--- a/仕様書/キャラクター.pptx
+++ b/仕様書/キャラクター.pptx
@@ -105,6 +105,11 @@
       </a:defRPr>
     </a:lvl9pPr>
   </p:defaultTextStyle>
+  <p:extLst>
+    <p:ext uri="{EFAFB233-063F-42B5-8137-9DF3F51BA10A}">
+      <p15:sldGuideLst xmlns:p15="http://schemas.microsoft.com/office/powerpoint/2012/main"/>
+    </p:ext>
+  </p:extLst>
 </p:presentation>
 </file>
 
@@ -113,7 +118,7 @@
   <pc:docChgLst>
     <pc:chgData name="黒沢　爽次" userId="fae486ef-0c84-45a4-a237-2d2b758b0e89" providerId="ADAL" clId="{877D3135-8805-4070-AC31-404870FE827C}"/>
     <pc:docChg chg="custSel addSld modSld">
-      <pc:chgData name="黒沢　爽次" userId="fae486ef-0c84-45a4-a237-2d2b758b0e89" providerId="ADAL" clId="{877D3135-8805-4070-AC31-404870FE827C}" dt="2026-06-02T03:31:39.055" v="356" actId="20577"/>
+      <pc:chgData name="黒沢　爽次" userId="fae486ef-0c84-45a4-a237-2d2b758b0e89" providerId="ADAL" clId="{877D3135-8805-4070-AC31-404870FE827C}" dt="2026-06-04T00:35:41.461" v="476" actId="1076"/>
       <pc:docMkLst>
         <pc:docMk/>
       </pc:docMkLst>
@@ -157,7 +162,7 @@
         </pc:spChg>
       </pc:sldChg>
       <pc:sldChg chg="addSp delSp modSp new mod">
-        <pc:chgData name="黒沢　爽次" userId="fae486ef-0c84-45a4-a237-2d2b758b0e89" providerId="ADAL" clId="{877D3135-8805-4070-AC31-404870FE827C}" dt="2026-06-02T03:31:39.055" v="356" actId="20577"/>
+        <pc:chgData name="黒沢　爽次" userId="fae486ef-0c84-45a4-a237-2d2b758b0e89" providerId="ADAL" clId="{877D3135-8805-4070-AC31-404870FE827C}" dt="2026-06-04T00:35:41.461" v="476" actId="1076"/>
         <pc:sldMkLst>
           <pc:docMk/>
           <pc:sldMk cId="3421931254" sldId="257"/>
@@ -168,6 +173,22 @@
             <pc:docMk/>
             <pc:sldMk cId="3421931254" sldId="257"/>
             <ac:spMk id="2" creationId="{41BC2A1C-9DCE-44D6-A82F-528630CBBEAF}"/>
+          </ac:spMkLst>
+        </pc:spChg>
+        <pc:spChg chg="add mod">
+          <ac:chgData name="黒沢　爽次" userId="fae486ef-0c84-45a4-a237-2d2b758b0e89" providerId="ADAL" clId="{877D3135-8805-4070-AC31-404870FE827C}" dt="2026-06-04T00:33:17.165" v="443" actId="1076"/>
+          <ac:spMkLst>
+            <pc:docMk/>
+            <pc:sldMk cId="3421931254" sldId="257"/>
+            <ac:spMk id="2" creationId="{5B9BAE7E-0EB8-4AB8-A301-8F6249AB01AA}"/>
+          </ac:spMkLst>
+        </pc:spChg>
+        <pc:spChg chg="add mod">
+          <ac:chgData name="黒沢　爽次" userId="fae486ef-0c84-45a4-a237-2d2b758b0e89" providerId="ADAL" clId="{877D3135-8805-4070-AC31-404870FE827C}" dt="2026-06-04T00:35:41.461" v="476" actId="1076"/>
+          <ac:spMkLst>
+            <pc:docMk/>
+            <pc:sldMk cId="3421931254" sldId="257"/>
+            <ac:spMk id="3" creationId="{938B8F5C-EA1A-43E5-A8F0-FD54D54F3972}"/>
           </ac:spMkLst>
         </pc:spChg>
         <pc:spChg chg="del">
@@ -187,7 +208,7 @@
           </ac:spMkLst>
         </pc:spChg>
         <pc:spChg chg="add mod">
-          <ac:chgData name="黒沢　爽次" userId="fae486ef-0c84-45a4-a237-2d2b758b0e89" providerId="ADAL" clId="{877D3135-8805-4070-AC31-404870FE827C}" dt="2026-06-02T03:31:39.055" v="356" actId="20577"/>
+          <ac:chgData name="黒沢　爽次" userId="fae486ef-0c84-45a4-a237-2d2b758b0e89" providerId="ADAL" clId="{877D3135-8805-4070-AC31-404870FE827C}" dt="2026-06-04T00:33:46.970" v="460" actId="20577"/>
           <ac:spMkLst>
             <pc:docMk/>
             <pc:sldMk cId="3421931254" sldId="257"/>
@@ -910,8 +931,8 @@
         </p:nvSpPr>
         <p:spPr>
           <a:xfrm>
-            <a:off x="2398816" y="2826327"/>
-            <a:ext cx="2550698" cy="1754326"/>
+            <a:off x="2375065" y="2291938"/>
+            <a:ext cx="2550698" cy="2031325"/>
           </a:xfrm>
           <a:prstGeom prst="rect">
             <a:avLst/>
@@ -987,7 +1008,94 @@
               <a:rPr lang="ja-JP" altLang="en-US" dirty="0"/>
               <a:t>能力低いが長射程</a:t>
             </a:r>
-            <a:endParaRPr kumimoji="1" lang="ja-JP" altLang="en-US" dirty="0"/>
+            <a:endParaRPr lang="en-US" altLang="ja-JP" dirty="0"/>
+          </a:p>
+          <a:p>
+            <a:pPr marL="285750" indent="-285750">
+              <a:buFont typeface="Arial" panose="020B0604020202020204" pitchFamily="34" charset="0"/>
+              <a:buChar char="•"/>
+            </a:pPr>
+            <a:r>
+              <a:rPr kumimoji="1" lang="ja-JP" altLang="en-US" dirty="0"/>
+              <a:t>妨害特化</a:t>
+            </a:r>
+          </a:p>
+        </p:txBody>
+      </p:sp>
+      <p:sp>
+        <p:nvSpPr>
+          <p:cNvPr id="2" name="テキスト ボックス 1">
+            <a:extLst>
+              <a:ext uri="{FF2B5EF4-FFF2-40B4-BE49-F238E27FC236}">
+                <a16:creationId xmlns:a16="http://schemas.microsoft.com/office/drawing/2014/main" id="{5B9BAE7E-0EB8-4AB8-A301-8F6249AB01AA}"/>
+              </a:ext>
+            </a:extLst>
+          </p:cNvPr>
+          <p:cNvSpPr txBox="1"/>
+          <p:nvPr/>
+        </p:nvSpPr>
+        <p:spPr>
+          <a:xfrm>
+            <a:off x="1911927" y="5159829"/>
+            <a:ext cx="4801314" cy="646331"/>
+          </a:xfrm>
+          <a:prstGeom prst="rect">
+            <a:avLst/>
+          </a:prstGeom>
+          <a:noFill/>
+        </p:spPr>
+        <p:txBody>
+          <a:bodyPr wrap="none" rtlCol="0">
+            <a:spAutoFit/>
+          </a:bodyPr>
+          <a:lstStyle/>
+          <a:p>
+            <a:r>
+              <a:rPr kumimoji="1" lang="ja-JP" altLang="en-US" dirty="0"/>
+              <a:t>経験値をためてプレイヤーレベルが上がると</a:t>
+            </a:r>
+            <a:endParaRPr kumimoji="1" lang="en-US" altLang="ja-JP" dirty="0"/>
+          </a:p>
+          <a:p>
+            <a:r>
+              <a:rPr kumimoji="1" lang="ja-JP" altLang="en-US" dirty="0"/>
+              <a:t>新キャラ開放</a:t>
+            </a:r>
+          </a:p>
+        </p:txBody>
+      </p:sp>
+      <p:sp>
+        <p:nvSpPr>
+          <p:cNvPr id="3" name="テキスト ボックス 2">
+            <a:extLst>
+              <a:ext uri="{FF2B5EF4-FFF2-40B4-BE49-F238E27FC236}">
+                <a16:creationId xmlns:a16="http://schemas.microsoft.com/office/drawing/2014/main" id="{938B8F5C-EA1A-43E5-A8F0-FD54D54F3972}"/>
+              </a:ext>
+            </a:extLst>
+          </p:cNvPr>
+          <p:cNvSpPr txBox="1"/>
+          <p:nvPr/>
+        </p:nvSpPr>
+        <p:spPr>
+          <a:xfrm flipH="1">
+            <a:off x="7349044" y="5950183"/>
+            <a:ext cx="2331843" cy="369332"/>
+          </a:xfrm>
+          <a:prstGeom prst="rect">
+            <a:avLst/>
+          </a:prstGeom>
+          <a:noFill/>
+        </p:spPr>
+        <p:txBody>
+          <a:bodyPr wrap="square" rtlCol="0">
+            <a:spAutoFit/>
+          </a:bodyPr>
+          <a:lstStyle/>
+          <a:p>
+            <a:r>
+              <a:rPr kumimoji="1" lang="ja-JP" altLang="en-US" dirty="0"/>
+              <a:t>思いつき次第追加</a:t>
+            </a:r>
           </a:p>
         </p:txBody>
       </p:sp>

--- a/仕様書/キャラクター.pptx
+++ b/仕様書/キャラクター.pptx
@@ -7,6 +7,13 @@
   <p:sldIdLst>
     <p:sldId id="256" r:id="rId2"/>
     <p:sldId id="257" r:id="rId3"/>
+    <p:sldId id="258" r:id="rId4"/>
+    <p:sldId id="259" r:id="rId5"/>
+    <p:sldId id="260" r:id="rId6"/>
+    <p:sldId id="261" r:id="rId7"/>
+    <p:sldId id="262" r:id="rId8"/>
+    <p:sldId id="263" r:id="rId9"/>
+    <p:sldId id="264" r:id="rId10"/>
   </p:sldIdLst>
   <p:sldSz cx="12192000" cy="6858000"/>
   <p:notesSz cx="6858000" cy="9144000"/>
@@ -117,17 +124,25 @@
 <pc:chgInfo xmlns:a="http://schemas.openxmlformats.org/drawingml/2006/main" xmlns:r="http://schemas.openxmlformats.org/officeDocument/2006/relationships" xmlns:ac="http://schemas.microsoft.com/office/drawing/2013/main/command" xmlns:pc="http://schemas.microsoft.com/office/powerpoint/2013/main/command">
   <pc:docChgLst>
     <pc:chgData name="黒沢　爽次" userId="fae486ef-0c84-45a4-a237-2d2b758b0e89" providerId="ADAL" clId="{877D3135-8805-4070-AC31-404870FE827C}"/>
-    <pc:docChg chg="custSel addSld modSld">
-      <pc:chgData name="黒沢　爽次" userId="fae486ef-0c84-45a4-a237-2d2b758b0e89" providerId="ADAL" clId="{877D3135-8805-4070-AC31-404870FE827C}" dt="2026-06-04T00:35:41.461" v="476" actId="1076"/>
+    <pc:docChg chg="undo custSel addSld modSld">
+      <pc:chgData name="黒沢　爽次" userId="fae486ef-0c84-45a4-a237-2d2b758b0e89" providerId="ADAL" clId="{877D3135-8805-4070-AC31-404870FE827C}" dt="2026-06-04T01:34:03.700" v="2251" actId="20577"/>
       <pc:docMkLst>
         <pc:docMk/>
       </pc:docMkLst>
       <pc:sldChg chg="addSp delSp modSp new mod">
-        <pc:chgData name="黒沢　爽次" userId="fae486ef-0c84-45a4-a237-2d2b758b0e89" providerId="ADAL" clId="{877D3135-8805-4070-AC31-404870FE827C}" dt="2026-06-02T03:27:36.226" v="149" actId="20577"/>
+        <pc:chgData name="黒沢　爽次" userId="fae486ef-0c84-45a4-a237-2d2b758b0e89" providerId="ADAL" clId="{877D3135-8805-4070-AC31-404870FE827C}" dt="2026-06-04T00:51:46.288" v="933" actId="1076"/>
         <pc:sldMkLst>
           <pc:docMk/>
           <pc:sldMk cId="1755018402" sldId="256"/>
         </pc:sldMkLst>
+        <pc:spChg chg="add mod">
+          <ac:chgData name="黒沢　爽次" userId="fae486ef-0c84-45a4-a237-2d2b758b0e89" providerId="ADAL" clId="{877D3135-8805-4070-AC31-404870FE827C}" dt="2026-06-04T00:51:46.288" v="933" actId="1076"/>
+          <ac:spMkLst>
+            <pc:docMk/>
+            <pc:sldMk cId="1755018402" sldId="256"/>
+            <ac:spMk id="2" creationId="{027F1829-1FF1-4B4F-ACF7-980DC9888073}"/>
+          </ac:spMkLst>
+        </pc:spChg>
         <pc:spChg chg="del">
           <ac:chgData name="黒沢　爽次" userId="fae486ef-0c84-45a4-a237-2d2b758b0e89" providerId="ADAL" clId="{877D3135-8805-4070-AC31-404870FE827C}" dt="2026-06-02T03:25:53.119" v="1" actId="478"/>
           <ac:spMkLst>
@@ -162,7 +177,7 @@
         </pc:spChg>
       </pc:sldChg>
       <pc:sldChg chg="addSp delSp modSp new mod">
-        <pc:chgData name="黒沢　爽次" userId="fae486ef-0c84-45a4-a237-2d2b758b0e89" providerId="ADAL" clId="{877D3135-8805-4070-AC31-404870FE827C}" dt="2026-06-04T00:35:41.461" v="476" actId="1076"/>
+        <pc:chgData name="黒沢　爽次" userId="fae486ef-0c84-45a4-a237-2d2b758b0e89" providerId="ADAL" clId="{877D3135-8805-4070-AC31-404870FE827C}" dt="2026-06-04T01:16:20.922" v="1703" actId="20577"/>
         <pc:sldMkLst>
           <pc:docMk/>
           <pc:sldMk cId="3421931254" sldId="257"/>
@@ -208,13 +223,214 @@
           </ac:spMkLst>
         </pc:spChg>
         <pc:spChg chg="add mod">
-          <ac:chgData name="黒沢　爽次" userId="fae486ef-0c84-45a4-a237-2d2b758b0e89" providerId="ADAL" clId="{877D3135-8805-4070-AC31-404870FE827C}" dt="2026-06-04T00:33:46.970" v="460" actId="20577"/>
+          <ac:chgData name="黒沢　爽次" userId="fae486ef-0c84-45a4-a237-2d2b758b0e89" providerId="ADAL" clId="{877D3135-8805-4070-AC31-404870FE827C}" dt="2026-06-04T01:16:20.922" v="1703" actId="20577"/>
           <ac:spMkLst>
             <pc:docMk/>
             <pc:sldMk cId="3421931254" sldId="257"/>
             <ac:spMk id="5" creationId="{08C330F5-189F-4170-A703-A1531F05D30A}"/>
           </ac:spMkLst>
         </pc:spChg>
+      </pc:sldChg>
+      <pc:sldChg chg="addSp delSp modSp new mod">
+        <pc:chgData name="黒沢　爽次" userId="fae486ef-0c84-45a4-a237-2d2b758b0e89" providerId="ADAL" clId="{877D3135-8805-4070-AC31-404870FE827C}" dt="2026-06-04T01:31:27.248" v="2171" actId="20577"/>
+        <pc:sldMkLst>
+          <pc:docMk/>
+          <pc:sldMk cId="776901126" sldId="258"/>
+        </pc:sldMkLst>
+        <pc:spChg chg="del">
+          <ac:chgData name="黒沢　爽次" userId="fae486ef-0c84-45a4-a237-2d2b758b0e89" providerId="ADAL" clId="{877D3135-8805-4070-AC31-404870FE827C}" dt="2026-06-04T00:41:07.208" v="478" actId="478"/>
+          <ac:spMkLst>
+            <pc:docMk/>
+            <pc:sldMk cId="776901126" sldId="258"/>
+            <ac:spMk id="2" creationId="{D6BCABF3-A490-45DC-8E88-CD86E64D14D6}"/>
+          </ac:spMkLst>
+        </pc:spChg>
+        <pc:spChg chg="del">
+          <ac:chgData name="黒沢　爽次" userId="fae486ef-0c84-45a4-a237-2d2b758b0e89" providerId="ADAL" clId="{877D3135-8805-4070-AC31-404870FE827C}" dt="2026-06-04T00:41:07.208" v="478" actId="478"/>
+          <ac:spMkLst>
+            <pc:docMk/>
+            <pc:sldMk cId="776901126" sldId="258"/>
+            <ac:spMk id="3" creationId="{750C7B91-65A5-43A4-9684-3355E1C8939C}"/>
+          </ac:spMkLst>
+        </pc:spChg>
+        <pc:spChg chg="add mod">
+          <ac:chgData name="黒沢　爽次" userId="fae486ef-0c84-45a4-a237-2d2b758b0e89" providerId="ADAL" clId="{877D3135-8805-4070-AC31-404870FE827C}" dt="2026-06-04T00:41:25.026" v="494" actId="115"/>
+          <ac:spMkLst>
+            <pc:docMk/>
+            <pc:sldMk cId="776901126" sldId="258"/>
+            <ac:spMk id="4" creationId="{CDB930A9-01B5-42D9-BBEE-3F2501F91D8D}"/>
+          </ac:spMkLst>
+        </pc:spChg>
+        <pc:spChg chg="add del mod">
+          <ac:chgData name="黒沢　爽次" userId="fae486ef-0c84-45a4-a237-2d2b758b0e89" providerId="ADAL" clId="{877D3135-8805-4070-AC31-404870FE827C}" dt="2026-06-04T00:43:30.089" v="571"/>
+          <ac:spMkLst>
+            <pc:docMk/>
+            <pc:sldMk cId="776901126" sldId="258"/>
+            <ac:spMk id="5" creationId="{0E9C750C-2F86-4DEB-8D1C-9F15ADBA9821}"/>
+          </ac:spMkLst>
+        </pc:spChg>
+        <pc:spChg chg="add mod">
+          <ac:chgData name="黒沢　爽次" userId="fae486ef-0c84-45a4-a237-2d2b758b0e89" providerId="ADAL" clId="{877D3135-8805-4070-AC31-404870FE827C}" dt="2026-06-04T01:31:27.248" v="2171" actId="20577"/>
+          <ac:spMkLst>
+            <pc:docMk/>
+            <pc:sldMk cId="776901126" sldId="258"/>
+            <ac:spMk id="7" creationId="{CFA21201-77FC-4CCA-A0ED-190309121061}"/>
+          </ac:spMkLst>
+        </pc:spChg>
+        <pc:graphicFrameChg chg="add mod modGraphic">
+          <ac:chgData name="黒沢　爽次" userId="fae486ef-0c84-45a4-a237-2d2b758b0e89" providerId="ADAL" clId="{877D3135-8805-4070-AC31-404870FE827C}" dt="2026-06-04T01:08:48.012" v="1502" actId="20577"/>
+          <ac:graphicFrameMkLst>
+            <pc:docMk/>
+            <pc:sldMk cId="776901126" sldId="258"/>
+            <ac:graphicFrameMk id="6" creationId="{ADFAA198-4C82-47B3-998F-E717146F6CA7}"/>
+          </ac:graphicFrameMkLst>
+        </pc:graphicFrameChg>
+      </pc:sldChg>
+      <pc:sldChg chg="addSp modSp add mod">
+        <pc:chgData name="黒沢　爽次" userId="fae486ef-0c84-45a4-a237-2d2b758b0e89" providerId="ADAL" clId="{877D3135-8805-4070-AC31-404870FE827C}" dt="2026-06-04T01:31:35.778" v="2181" actId="20577"/>
+        <pc:sldMkLst>
+          <pc:docMk/>
+          <pc:sldMk cId="3538850053" sldId="259"/>
+        </pc:sldMkLst>
+        <pc:spChg chg="mod">
+          <ac:chgData name="黒沢　爽次" userId="fae486ef-0c84-45a4-a237-2d2b758b0e89" providerId="ADAL" clId="{877D3135-8805-4070-AC31-404870FE827C}" dt="2026-06-04T00:57:14.463" v="1116" actId="20577"/>
+          <ac:spMkLst>
+            <pc:docMk/>
+            <pc:sldMk cId="3538850053" sldId="259"/>
+            <ac:spMk id="4" creationId="{CDB930A9-01B5-42D9-BBEE-3F2501F91D8D}"/>
+          </ac:spMkLst>
+        </pc:spChg>
+        <pc:spChg chg="add mod">
+          <ac:chgData name="黒沢　爽次" userId="fae486ef-0c84-45a4-a237-2d2b758b0e89" providerId="ADAL" clId="{877D3135-8805-4070-AC31-404870FE827C}" dt="2026-06-04T01:31:35.778" v="2181" actId="20577"/>
+          <ac:spMkLst>
+            <pc:docMk/>
+            <pc:sldMk cId="3538850053" sldId="259"/>
+            <ac:spMk id="5" creationId="{8C7BF306-8508-4A5E-98AD-895246A1CAC1}"/>
+          </ac:spMkLst>
+        </pc:spChg>
+        <pc:graphicFrameChg chg="modGraphic">
+          <ac:chgData name="黒沢　爽次" userId="fae486ef-0c84-45a4-a237-2d2b758b0e89" providerId="ADAL" clId="{877D3135-8805-4070-AC31-404870FE827C}" dt="2026-06-04T01:07:36.660" v="1424" actId="20577"/>
+          <ac:graphicFrameMkLst>
+            <pc:docMk/>
+            <pc:sldMk cId="3538850053" sldId="259"/>
+            <ac:graphicFrameMk id="6" creationId="{ADFAA198-4C82-47B3-998F-E717146F6CA7}"/>
+          </ac:graphicFrameMkLst>
+        </pc:graphicFrameChg>
+      </pc:sldChg>
+      <pc:sldChg chg="addSp modSp add mod">
+        <pc:chgData name="黒沢　爽次" userId="fae486ef-0c84-45a4-a237-2d2b758b0e89" providerId="ADAL" clId="{877D3135-8805-4070-AC31-404870FE827C}" dt="2026-06-04T01:32:36.668" v="2208" actId="20577"/>
+        <pc:sldMkLst>
+          <pc:docMk/>
+          <pc:sldMk cId="2322425682" sldId="260"/>
+        </pc:sldMkLst>
+        <pc:spChg chg="mod">
+          <ac:chgData name="黒沢　爽次" userId="fae486ef-0c84-45a4-a237-2d2b758b0e89" providerId="ADAL" clId="{877D3135-8805-4070-AC31-404870FE827C}" dt="2026-06-04T01:07:49.935" v="1445" actId="20577"/>
+          <ac:spMkLst>
+            <pc:docMk/>
+            <pc:sldMk cId="2322425682" sldId="260"/>
+            <ac:spMk id="4" creationId="{CDB930A9-01B5-42D9-BBEE-3F2501F91D8D}"/>
+          </ac:spMkLst>
+        </pc:spChg>
+        <pc:spChg chg="add mod">
+          <ac:chgData name="黒沢　爽次" userId="fae486ef-0c84-45a4-a237-2d2b758b0e89" providerId="ADAL" clId="{877D3135-8805-4070-AC31-404870FE827C}" dt="2026-06-04T01:32:20.770" v="2189" actId="20577"/>
+          <ac:spMkLst>
+            <pc:docMk/>
+            <pc:sldMk cId="2322425682" sldId="260"/>
+            <ac:spMk id="5" creationId="{B4983D67-C329-4A79-A624-464A410881FC}"/>
+          </ac:spMkLst>
+        </pc:spChg>
+        <pc:graphicFrameChg chg="modGraphic">
+          <ac:chgData name="黒沢　爽次" userId="fae486ef-0c84-45a4-a237-2d2b758b0e89" providerId="ADAL" clId="{877D3135-8805-4070-AC31-404870FE827C}" dt="2026-06-04T01:32:36.668" v="2208" actId="20577"/>
+          <ac:graphicFrameMkLst>
+            <pc:docMk/>
+            <pc:sldMk cId="2322425682" sldId="260"/>
+            <ac:graphicFrameMk id="6" creationId="{ADFAA198-4C82-47B3-998F-E717146F6CA7}"/>
+          </ac:graphicFrameMkLst>
+        </pc:graphicFrameChg>
+      </pc:sldChg>
+      <pc:sldChg chg="addSp modSp add mod">
+        <pc:chgData name="黒沢　爽次" userId="fae486ef-0c84-45a4-a237-2d2b758b0e89" providerId="ADAL" clId="{877D3135-8805-4070-AC31-404870FE827C}" dt="2026-06-04T01:33:11.849" v="2229" actId="20577"/>
+        <pc:sldMkLst>
+          <pc:docMk/>
+          <pc:sldMk cId="647613495" sldId="261"/>
+        </pc:sldMkLst>
+        <pc:spChg chg="mod">
+          <ac:chgData name="黒沢　爽次" userId="fae486ef-0c84-45a4-a237-2d2b758b0e89" providerId="ADAL" clId="{877D3135-8805-4070-AC31-404870FE827C}" dt="2026-06-04T01:20:13.107" v="1939" actId="20577"/>
+          <ac:spMkLst>
+            <pc:docMk/>
+            <pc:sldMk cId="647613495" sldId="261"/>
+            <ac:spMk id="4" creationId="{CDB930A9-01B5-42D9-BBEE-3F2501F91D8D}"/>
+          </ac:spMkLst>
+        </pc:spChg>
+        <pc:spChg chg="add mod">
+          <ac:chgData name="黒沢　爽次" userId="fae486ef-0c84-45a4-a237-2d2b758b0e89" providerId="ADAL" clId="{877D3135-8805-4070-AC31-404870FE827C}" dt="2026-06-04T01:33:11.849" v="2229" actId="20577"/>
+          <ac:spMkLst>
+            <pc:docMk/>
+            <pc:sldMk cId="647613495" sldId="261"/>
+            <ac:spMk id="5" creationId="{8BD76852-170D-4ABC-A233-BF44249999A5}"/>
+          </ac:spMkLst>
+        </pc:spChg>
+        <pc:graphicFrameChg chg="modGraphic">
+          <ac:chgData name="黒沢　爽次" userId="fae486ef-0c84-45a4-a237-2d2b758b0e89" providerId="ADAL" clId="{877D3135-8805-4070-AC31-404870FE827C}" dt="2026-06-04T01:19:39.319" v="1925" actId="20577"/>
+          <ac:graphicFrameMkLst>
+            <pc:docMk/>
+            <pc:sldMk cId="647613495" sldId="261"/>
+            <ac:graphicFrameMk id="6" creationId="{ADFAA198-4C82-47B3-998F-E717146F6CA7}"/>
+          </ac:graphicFrameMkLst>
+        </pc:graphicFrameChg>
+      </pc:sldChg>
+      <pc:sldChg chg="addSp modSp add mod">
+        <pc:chgData name="黒沢　爽次" userId="fae486ef-0c84-45a4-a237-2d2b758b0e89" providerId="ADAL" clId="{877D3135-8805-4070-AC31-404870FE827C}" dt="2026-06-04T01:33:44.179" v="2238" actId="20577"/>
+        <pc:sldMkLst>
+          <pc:docMk/>
+          <pc:sldMk cId="3456137557" sldId="262"/>
+        </pc:sldMkLst>
+        <pc:spChg chg="mod">
+          <ac:chgData name="黒沢　爽次" userId="fae486ef-0c84-45a4-a237-2d2b758b0e89" providerId="ADAL" clId="{877D3135-8805-4070-AC31-404870FE827C}" dt="2026-06-04T01:20:19.985" v="1952" actId="20577"/>
+          <ac:spMkLst>
+            <pc:docMk/>
+            <pc:sldMk cId="3456137557" sldId="262"/>
+            <ac:spMk id="4" creationId="{CDB930A9-01B5-42D9-BBEE-3F2501F91D8D}"/>
+          </ac:spMkLst>
+        </pc:spChg>
+        <pc:spChg chg="add mod">
+          <ac:chgData name="黒沢　爽次" userId="fae486ef-0c84-45a4-a237-2d2b758b0e89" providerId="ADAL" clId="{877D3135-8805-4070-AC31-404870FE827C}" dt="2026-06-04T01:33:44.179" v="2238" actId="20577"/>
+          <ac:spMkLst>
+            <pc:docMk/>
+            <pc:sldMk cId="3456137557" sldId="262"/>
+            <ac:spMk id="5" creationId="{46A3F2D3-3564-4A75-9CF5-FEA21278DC76}"/>
+          </ac:spMkLst>
+        </pc:spChg>
+        <pc:graphicFrameChg chg="modGraphic">
+          <ac:chgData name="黒沢　爽次" userId="fae486ef-0c84-45a4-a237-2d2b758b0e89" providerId="ADAL" clId="{877D3135-8805-4070-AC31-404870FE827C}" dt="2026-06-04T01:31:13.124" v="2154" actId="20577"/>
+          <ac:graphicFrameMkLst>
+            <pc:docMk/>
+            <pc:sldMk cId="3456137557" sldId="262"/>
+            <ac:graphicFrameMk id="6" creationId="{ADFAA198-4C82-47B3-998F-E717146F6CA7}"/>
+          </ac:graphicFrameMkLst>
+        </pc:graphicFrameChg>
+      </pc:sldChg>
+      <pc:sldChg chg="modSp add mod">
+        <pc:chgData name="黒沢　爽次" userId="fae486ef-0c84-45a4-a237-2d2b758b0e89" providerId="ADAL" clId="{877D3135-8805-4070-AC31-404870FE827C}" dt="2026-06-04T01:34:03.700" v="2251" actId="20577"/>
+        <pc:sldMkLst>
+          <pc:docMk/>
+          <pc:sldMk cId="3136141015" sldId="263"/>
+        </pc:sldMkLst>
+        <pc:spChg chg="mod">
+          <ac:chgData name="黒沢　爽次" userId="fae486ef-0c84-45a4-a237-2d2b758b0e89" providerId="ADAL" clId="{877D3135-8805-4070-AC31-404870FE827C}" dt="2026-06-04T01:34:03.700" v="2251" actId="20577"/>
+          <ac:spMkLst>
+            <pc:docMk/>
+            <pc:sldMk cId="3136141015" sldId="263"/>
+            <ac:spMk id="4" creationId="{CDB930A9-01B5-42D9-BBEE-3F2501F91D8D}"/>
+          </ac:spMkLst>
+        </pc:spChg>
+      </pc:sldChg>
+      <pc:sldChg chg="add">
+        <pc:chgData name="黒沢　爽次" userId="fae486ef-0c84-45a4-a237-2d2b758b0e89" providerId="ADAL" clId="{877D3135-8805-4070-AC31-404870FE827C}" dt="2026-06-04T00:46:56.698" v="736"/>
+        <pc:sldMkLst>
+          <pc:docMk/>
+          <pc:sldMk cId="1513510081" sldId="264"/>
+        </pc:sldMkLst>
       </pc:sldChg>
       <pc:sldMasterChg chg="addSldLayout">
         <pc:chgData name="黒沢　爽次" userId="fae486ef-0c84-45a4-a237-2d2b758b0e89" providerId="ADAL" clId="{877D3135-8805-4070-AC31-404870FE827C}" dt="2026-06-02T03:25:48.798" v="0" actId="680"/>
@@ -852,6 +1068,91 @@
           </a:p>
         </p:txBody>
       </p:sp>
+      <p:sp>
+        <p:nvSpPr>
+          <p:cNvPr id="2" name="テキスト ボックス 1">
+            <a:extLst>
+              <a:ext uri="{FF2B5EF4-FFF2-40B4-BE49-F238E27FC236}">
+                <a16:creationId xmlns:a16="http://schemas.microsoft.com/office/drawing/2014/main" id="{027F1829-1FF1-4B4F-ACF7-980DC9888073}"/>
+              </a:ext>
+            </a:extLst>
+          </p:cNvPr>
+          <p:cNvSpPr txBox="1"/>
+          <p:nvPr/>
+        </p:nvSpPr>
+        <p:spPr>
+          <a:xfrm>
+            <a:off x="5201392" y="2671948"/>
+            <a:ext cx="5782352" cy="923330"/>
+          </a:xfrm>
+          <a:prstGeom prst="rect">
+            <a:avLst/>
+          </a:prstGeom>
+          <a:noFill/>
+        </p:spPr>
+        <p:txBody>
+          <a:bodyPr wrap="none" rtlCol="0">
+            <a:spAutoFit/>
+          </a:bodyPr>
+          <a:lstStyle/>
+          <a:p>
+            <a:pPr marL="285750" indent="-285750">
+              <a:buFont typeface="Arial" panose="020B0604020202020204" pitchFamily="34" charset="0"/>
+              <a:buChar char="•"/>
+            </a:pPr>
+            <a:r>
+              <a:rPr kumimoji="1" lang="ja-JP" altLang="en-US" dirty="0"/>
+              <a:t>通常攻撃</a:t>
+            </a:r>
+            <a:r>
+              <a:rPr kumimoji="1" lang="en-US" altLang="ja-JP" dirty="0"/>
+              <a:t>…</a:t>
+            </a:r>
+            <a:r>
+              <a:rPr kumimoji="1" lang="ja-JP" altLang="en-US" dirty="0"/>
+              <a:t>無制限</a:t>
+            </a:r>
+            <a:endParaRPr kumimoji="1" lang="en-US" altLang="ja-JP" dirty="0"/>
+          </a:p>
+          <a:p>
+            <a:pPr marL="285750" indent="-285750">
+              <a:buFont typeface="Arial" panose="020B0604020202020204" pitchFamily="34" charset="0"/>
+              <a:buChar char="•"/>
+            </a:pPr>
+            <a:r>
+              <a:rPr lang="ja-JP" altLang="en-US" dirty="0"/>
+              <a:t>スキル</a:t>
+            </a:r>
+            <a:r>
+              <a:rPr lang="en-US" altLang="ja-JP" dirty="0"/>
+              <a:t>…</a:t>
+            </a:r>
+            <a:r>
+              <a:rPr lang="ja-JP" altLang="en-US" dirty="0"/>
+              <a:t>時間経過で使用可能に</a:t>
+            </a:r>
+            <a:endParaRPr lang="en-US" altLang="ja-JP" dirty="0"/>
+          </a:p>
+          <a:p>
+            <a:pPr marL="285750" indent="-285750">
+              <a:buFont typeface="Arial" panose="020B0604020202020204" pitchFamily="34" charset="0"/>
+              <a:buChar char="•"/>
+            </a:pPr>
+            <a:r>
+              <a:rPr kumimoji="1" lang="ja-JP" altLang="en-US" dirty="0"/>
+              <a:t>必殺技</a:t>
+            </a:r>
+            <a:r>
+              <a:rPr kumimoji="1" lang="en-US" altLang="ja-JP" dirty="0"/>
+              <a:t>…</a:t>
+            </a:r>
+            <a:r>
+              <a:rPr kumimoji="1" lang="ja-JP" altLang="en-US" dirty="0"/>
+              <a:t>エリア内のアイテムを集めると使用可能に</a:t>
+            </a:r>
+          </a:p>
+        </p:txBody>
+      </p:sp>
     </p:spTree>
     <p:extLst>
       <p:ext uri="{BB962C8B-B14F-4D97-AF65-F5344CB8AC3E}">
@@ -932,7 +1233,7 @@
         <p:spPr>
           <a:xfrm>
             <a:off x="2375065" y="2291938"/>
-            <a:ext cx="2550698" cy="2031325"/>
+            <a:ext cx="2319866" cy="1477328"/>
           </a:xfrm>
           <a:prstGeom prst="rect">
             <a:avLst/>
@@ -962,7 +1263,7 @@
             </a:pPr>
             <a:r>
               <a:rPr lang="ja-JP" altLang="en-US" dirty="0"/>
-              <a:t>速いけど低耐久</a:t>
+              <a:t>速くて低耐久</a:t>
             </a:r>
             <a:endParaRPr lang="en-US" altLang="ja-JP" dirty="0"/>
           </a:p>
@@ -973,7 +1274,7 @@
             </a:pPr>
             <a:r>
               <a:rPr kumimoji="1" lang="ja-JP" altLang="en-US" dirty="0"/>
-              <a:t>遅いけど高耐久</a:t>
+              <a:t>遅くて高耐久</a:t>
             </a:r>
             <a:endParaRPr kumimoji="1" lang="en-US" altLang="ja-JP" dirty="0"/>
           </a:p>
@@ -984,29 +1285,7 @@
             </a:pPr>
             <a:r>
               <a:rPr lang="ja-JP" altLang="en-US" dirty="0"/>
-              <a:t>空飛べる</a:t>
-            </a:r>
-            <a:endParaRPr lang="en-US" altLang="ja-JP" dirty="0"/>
-          </a:p>
-          <a:p>
-            <a:pPr marL="285750" indent="-285750">
-              <a:buFont typeface="Arial" panose="020B0604020202020204" pitchFamily="34" charset="0"/>
-              <a:buChar char="•"/>
-            </a:pPr>
-            <a:r>
-              <a:rPr kumimoji="1" lang="ja-JP" altLang="en-US" dirty="0"/>
-              <a:t>能力高いが近接のみ</a:t>
-            </a:r>
-            <a:endParaRPr kumimoji="1" lang="en-US" altLang="ja-JP" dirty="0"/>
-          </a:p>
-          <a:p>
-            <a:pPr marL="285750" indent="-285750">
-              <a:buFont typeface="Arial" panose="020B0604020202020204" pitchFamily="34" charset="0"/>
-              <a:buChar char="•"/>
-            </a:pPr>
-            <a:r>
-              <a:rPr lang="ja-JP" altLang="en-US" dirty="0"/>
-              <a:t>能力低いが長射程</a:t>
+              <a:t>能力低くて長射程</a:t>
             </a:r>
             <a:endParaRPr lang="en-US" altLang="ja-JP" dirty="0"/>
           </a:p>
@@ -1103,6 +1382,2959 @@
     <p:extLst>
       <p:ext uri="{BB962C8B-B14F-4D97-AF65-F5344CB8AC3E}">
         <p14:creationId xmlns:p14="http://schemas.microsoft.com/office/powerpoint/2010/main" val="3421931254"/>
+      </p:ext>
+    </p:extLst>
+  </p:cSld>
+  <p:clrMapOvr>
+    <a:masterClrMapping/>
+  </p:clrMapOvr>
+</p:sld>
+</file>
+
+<file path=ppt/slides/slide3.xml><?xml version="1.0" encoding="utf-8"?>
+<p:sld xmlns:a="http://schemas.openxmlformats.org/drawingml/2006/main" xmlns:r="http://schemas.openxmlformats.org/officeDocument/2006/relationships" xmlns:p="http://schemas.openxmlformats.org/presentationml/2006/main">
+  <p:cSld>
+    <p:spTree>
+      <p:nvGrpSpPr>
+        <p:cNvPr id="1" name=""/>
+        <p:cNvGrpSpPr/>
+        <p:nvPr/>
+      </p:nvGrpSpPr>
+      <p:grpSpPr>
+        <a:xfrm>
+          <a:off x="0" y="0"/>
+          <a:ext cx="0" cy="0"/>
+          <a:chOff x="0" y="0"/>
+          <a:chExt cx="0" cy="0"/>
+        </a:xfrm>
+      </p:grpSpPr>
+      <p:sp>
+        <p:nvSpPr>
+          <p:cNvPr id="4" name="テキスト ボックス 3">
+            <a:extLst>
+              <a:ext uri="{FF2B5EF4-FFF2-40B4-BE49-F238E27FC236}">
+                <a16:creationId xmlns:a16="http://schemas.microsoft.com/office/drawing/2014/main" id="{CDB930A9-01B5-42D9-BBEE-3F2501F91D8D}"/>
+              </a:ext>
+            </a:extLst>
+          </p:cNvPr>
+          <p:cNvSpPr txBox="1"/>
+          <p:nvPr/>
+        </p:nvSpPr>
+        <p:spPr>
+          <a:xfrm>
+            <a:off x="1353787" y="1460665"/>
+            <a:ext cx="1338828" cy="369332"/>
+          </a:xfrm>
+          <a:prstGeom prst="rect">
+            <a:avLst/>
+          </a:prstGeom>
+          <a:noFill/>
+        </p:spPr>
+        <p:txBody>
+          <a:bodyPr wrap="none" rtlCol="0">
+            <a:spAutoFit/>
+          </a:bodyPr>
+          <a:lstStyle/>
+          <a:p>
+            <a:r>
+              <a:rPr kumimoji="1" lang="ja-JP" altLang="en-US" u="sng" dirty="0"/>
+              <a:t>バランス型</a:t>
+            </a:r>
+          </a:p>
+        </p:txBody>
+      </p:sp>
+      <p:graphicFrame>
+        <p:nvGraphicFramePr>
+          <p:cNvPr id="6" name="表 6">
+            <a:extLst>
+              <a:ext uri="{FF2B5EF4-FFF2-40B4-BE49-F238E27FC236}">
+                <a16:creationId xmlns:a16="http://schemas.microsoft.com/office/drawing/2014/main" id="{ADFAA198-4C82-47B3-998F-E717146F6CA7}"/>
+              </a:ext>
+            </a:extLst>
+          </p:cNvPr>
+          <p:cNvGraphicFramePr>
+            <a:graphicFrameLocks noGrp="1"/>
+          </p:cNvGraphicFramePr>
+          <p:nvPr>
+            <p:extLst>
+              <p:ext uri="{D42A27DB-BD31-4B8C-83A1-F6EECF244321}">
+                <p14:modId xmlns:p14="http://schemas.microsoft.com/office/powerpoint/2010/main" val="2876920752"/>
+              </p:ext>
+            </p:extLst>
+          </p:nvPr>
+        </p:nvGraphicFramePr>
+        <p:xfrm>
+          <a:off x="1746993" y="2432124"/>
+          <a:ext cx="8128000" cy="3337560"/>
+        </p:xfrm>
+        <a:graphic>
+          <a:graphicData uri="http://schemas.openxmlformats.org/drawingml/2006/table">
+            <a:tbl>
+              <a:tblPr firstRow="1" bandRow="1">
+                <a:tableStyleId>{5C22544A-7EE6-4342-B048-85BDC9FD1C3A}</a:tableStyleId>
+              </a:tblPr>
+              <a:tblGrid>
+                <a:gridCol w="2575625">
+                  <a:extLst>
+                    <a:ext uri="{9D8B030D-6E8A-4147-A177-3AD203B41FA5}">
+                      <a16:colId xmlns:a16="http://schemas.microsoft.com/office/drawing/2014/main" val="2168610415"/>
+                    </a:ext>
+                  </a:extLst>
+                </a:gridCol>
+                <a:gridCol w="5552375">
+                  <a:extLst>
+                    <a:ext uri="{9D8B030D-6E8A-4147-A177-3AD203B41FA5}">
+                      <a16:colId xmlns:a16="http://schemas.microsoft.com/office/drawing/2014/main" val="3530299536"/>
+                    </a:ext>
+                  </a:extLst>
+                </a:gridCol>
+              </a:tblGrid>
+              <a:tr h="370840">
+                <a:tc>
+                  <a:txBody>
+                    <a:bodyPr/>
+                    <a:lstStyle/>
+                    <a:p>
+                      <a:endParaRPr kumimoji="1" lang="ja-JP" altLang="en-US" dirty="0"/>
+                    </a:p>
+                  </a:txBody>
+                  <a:tcPr/>
+                </a:tc>
+                <a:tc>
+                  <a:txBody>
+                    <a:bodyPr/>
+                    <a:lstStyle/>
+                    <a:p>
+                      <a:endParaRPr kumimoji="1" lang="ja-JP" altLang="en-US"/>
+                    </a:p>
+                  </a:txBody>
+                  <a:tcPr/>
+                </a:tc>
+                <a:extLst>
+                  <a:ext uri="{0D108BD9-81ED-4DB2-BD59-A6C34878D82A}">
+                    <a16:rowId xmlns:a16="http://schemas.microsoft.com/office/drawing/2014/main" val="287851579"/>
+                  </a:ext>
+                </a:extLst>
+              </a:tr>
+              <a:tr h="370840">
+                <a:tc>
+                  <a:txBody>
+                    <a:bodyPr/>
+                    <a:lstStyle/>
+                    <a:p>
+                      <a:r>
+                        <a:rPr kumimoji="1" lang="ja-JP" altLang="en-US" dirty="0"/>
+                        <a:t>体力</a:t>
+                      </a:r>
+                    </a:p>
+                  </a:txBody>
+                  <a:tcPr/>
+                </a:tc>
+                <a:tc>
+                  <a:txBody>
+                    <a:bodyPr/>
+                    <a:lstStyle/>
+                    <a:p>
+                      <a:r>
+                        <a:rPr kumimoji="1" lang="ja-JP" altLang="en-US" dirty="0"/>
+                        <a:t>中</a:t>
+                      </a:r>
+                    </a:p>
+                  </a:txBody>
+                  <a:tcPr/>
+                </a:tc>
+                <a:extLst>
+                  <a:ext uri="{0D108BD9-81ED-4DB2-BD59-A6C34878D82A}">
+                    <a16:rowId xmlns:a16="http://schemas.microsoft.com/office/drawing/2014/main" val="2179425768"/>
+                  </a:ext>
+                </a:extLst>
+              </a:tr>
+              <a:tr h="370840">
+                <a:tc>
+                  <a:txBody>
+                    <a:bodyPr/>
+                    <a:lstStyle/>
+                    <a:p>
+                      <a:r>
+                        <a:rPr kumimoji="1" lang="ja-JP" altLang="en-US" dirty="0"/>
+                        <a:t>攻撃力</a:t>
+                      </a:r>
+                    </a:p>
+                  </a:txBody>
+                  <a:tcPr/>
+                </a:tc>
+                <a:tc>
+                  <a:txBody>
+                    <a:bodyPr/>
+                    <a:lstStyle/>
+                    <a:p>
+                      <a:r>
+                        <a:rPr kumimoji="1" lang="ja-JP" altLang="en-US" dirty="0"/>
+                        <a:t>中</a:t>
+                      </a:r>
+                    </a:p>
+                  </a:txBody>
+                  <a:tcPr/>
+                </a:tc>
+                <a:extLst>
+                  <a:ext uri="{0D108BD9-81ED-4DB2-BD59-A6C34878D82A}">
+                    <a16:rowId xmlns:a16="http://schemas.microsoft.com/office/drawing/2014/main" val="2170705841"/>
+                  </a:ext>
+                </a:extLst>
+              </a:tr>
+              <a:tr h="370840">
+                <a:tc>
+                  <a:txBody>
+                    <a:bodyPr/>
+                    <a:lstStyle/>
+                    <a:p>
+                      <a:r>
+                        <a:rPr kumimoji="1" lang="ja-JP" altLang="en-US" dirty="0"/>
+                        <a:t>素早さ</a:t>
+                      </a:r>
+                    </a:p>
+                  </a:txBody>
+                  <a:tcPr/>
+                </a:tc>
+                <a:tc>
+                  <a:txBody>
+                    <a:bodyPr/>
+                    <a:lstStyle/>
+                    <a:p>
+                      <a:r>
+                        <a:rPr kumimoji="1" lang="ja-JP" altLang="en-US" dirty="0"/>
+                        <a:t>中</a:t>
+                      </a:r>
+                    </a:p>
+                  </a:txBody>
+                  <a:tcPr/>
+                </a:tc>
+                <a:extLst>
+                  <a:ext uri="{0D108BD9-81ED-4DB2-BD59-A6C34878D82A}">
+                    <a16:rowId xmlns:a16="http://schemas.microsoft.com/office/drawing/2014/main" val="1438526933"/>
+                  </a:ext>
+                </a:extLst>
+              </a:tr>
+              <a:tr h="370840">
+                <a:tc>
+                  <a:txBody>
+                    <a:bodyPr/>
+                    <a:lstStyle/>
+                    <a:p>
+                      <a:r>
+                        <a:rPr kumimoji="1" lang="ja-JP" altLang="en-US" dirty="0"/>
+                        <a:t>通常攻撃</a:t>
+                      </a:r>
+                    </a:p>
+                  </a:txBody>
+                  <a:tcPr/>
+                </a:tc>
+                <a:tc>
+                  <a:txBody>
+                    <a:bodyPr/>
+                    <a:lstStyle/>
+                    <a:p>
+                      <a:r>
+                        <a:rPr kumimoji="1" lang="ja-JP" altLang="en-US" dirty="0"/>
+                        <a:t>剣による近接攻撃　硬直時間：中</a:t>
+                      </a:r>
+                    </a:p>
+                  </a:txBody>
+                  <a:tcPr/>
+                </a:tc>
+                <a:extLst>
+                  <a:ext uri="{0D108BD9-81ED-4DB2-BD59-A6C34878D82A}">
+                    <a16:rowId xmlns:a16="http://schemas.microsoft.com/office/drawing/2014/main" val="391020856"/>
+                  </a:ext>
+                </a:extLst>
+              </a:tr>
+              <a:tr h="370840">
+                <a:tc>
+                  <a:txBody>
+                    <a:bodyPr/>
+                    <a:lstStyle/>
+                    <a:p>
+                      <a:r>
+                        <a:rPr kumimoji="1" lang="ja-JP" altLang="en-US" dirty="0"/>
+                        <a:t>スキル</a:t>
+                      </a:r>
+                    </a:p>
+                  </a:txBody>
+                  <a:tcPr/>
+                </a:tc>
+                <a:tc>
+                  <a:txBody>
+                    <a:bodyPr/>
+                    <a:lstStyle/>
+                    <a:p>
+                      <a:r>
+                        <a:rPr kumimoji="1" lang="ja-JP" altLang="en-US" dirty="0"/>
+                        <a:t>攻撃力と素早さにバフ</a:t>
+                      </a:r>
+                    </a:p>
+                  </a:txBody>
+                  <a:tcPr/>
+                </a:tc>
+                <a:extLst>
+                  <a:ext uri="{0D108BD9-81ED-4DB2-BD59-A6C34878D82A}">
+                    <a16:rowId xmlns:a16="http://schemas.microsoft.com/office/drawing/2014/main" val="969716069"/>
+                  </a:ext>
+                </a:extLst>
+              </a:tr>
+              <a:tr h="370840">
+                <a:tc>
+                  <a:txBody>
+                    <a:bodyPr/>
+                    <a:lstStyle/>
+                    <a:p>
+                      <a:r>
+                        <a:rPr kumimoji="1" lang="ja-JP" altLang="en-US" dirty="0"/>
+                        <a:t>必殺技</a:t>
+                      </a:r>
+                    </a:p>
+                  </a:txBody>
+                  <a:tcPr/>
+                </a:tc>
+                <a:tc>
+                  <a:txBody>
+                    <a:bodyPr/>
+                    <a:lstStyle/>
+                    <a:p>
+                      <a:r>
+                        <a:rPr kumimoji="1" lang="ja-JP" altLang="en-US" dirty="0"/>
+                        <a:t>剣を前方に向けて突進、大ダメージ。突進中は無敵</a:t>
+                      </a:r>
+                    </a:p>
+                  </a:txBody>
+                  <a:tcPr/>
+                </a:tc>
+                <a:extLst>
+                  <a:ext uri="{0D108BD9-81ED-4DB2-BD59-A6C34878D82A}">
+                    <a16:rowId xmlns:a16="http://schemas.microsoft.com/office/drawing/2014/main" val="3820238464"/>
+                  </a:ext>
+                </a:extLst>
+              </a:tr>
+              <a:tr h="370840">
+                <a:tc>
+                  <a:txBody>
+                    <a:bodyPr/>
+                    <a:lstStyle/>
+                    <a:p>
+                      <a:r>
+                        <a:rPr kumimoji="1" lang="ja-JP" altLang="en-US" dirty="0"/>
+                        <a:t>解放されるタイミング</a:t>
+                      </a:r>
+                    </a:p>
+                  </a:txBody>
+                  <a:tcPr/>
+                </a:tc>
+                <a:tc>
+                  <a:txBody>
+                    <a:bodyPr/>
+                    <a:lstStyle/>
+                    <a:p>
+                      <a:r>
+                        <a:rPr kumimoji="1" lang="ja-JP" altLang="en-US" dirty="0"/>
+                        <a:t>はじめから</a:t>
+                      </a:r>
+                    </a:p>
+                  </a:txBody>
+                  <a:tcPr/>
+                </a:tc>
+                <a:extLst>
+                  <a:ext uri="{0D108BD9-81ED-4DB2-BD59-A6C34878D82A}">
+                    <a16:rowId xmlns:a16="http://schemas.microsoft.com/office/drawing/2014/main" val="4086754404"/>
+                  </a:ext>
+                </a:extLst>
+              </a:tr>
+              <a:tr h="370840">
+                <a:tc>
+                  <a:txBody>
+                    <a:bodyPr/>
+                    <a:lstStyle/>
+                    <a:p>
+                      <a:r>
+                        <a:rPr kumimoji="1" lang="ja-JP" altLang="en-US" dirty="0"/>
+                        <a:t>備考</a:t>
+                      </a:r>
+                    </a:p>
+                  </a:txBody>
+                  <a:tcPr/>
+                </a:tc>
+                <a:tc>
+                  <a:txBody>
+                    <a:bodyPr/>
+                    <a:lstStyle/>
+                    <a:p>
+                      <a:endParaRPr kumimoji="1" lang="ja-JP" altLang="en-US" dirty="0"/>
+                    </a:p>
+                  </a:txBody>
+                  <a:tcPr/>
+                </a:tc>
+                <a:extLst>
+                  <a:ext uri="{0D108BD9-81ED-4DB2-BD59-A6C34878D82A}">
+                    <a16:rowId xmlns:a16="http://schemas.microsoft.com/office/drawing/2014/main" val="1182665698"/>
+                  </a:ext>
+                </a:extLst>
+              </a:tr>
+            </a:tbl>
+          </a:graphicData>
+        </a:graphic>
+      </p:graphicFrame>
+      <p:sp>
+        <p:nvSpPr>
+          <p:cNvPr id="7" name="テキスト ボックス 6">
+            <a:extLst>
+              <a:ext uri="{FF2B5EF4-FFF2-40B4-BE49-F238E27FC236}">
+                <a16:creationId xmlns:a16="http://schemas.microsoft.com/office/drawing/2014/main" id="{CFA21201-77FC-4CCA-A0ED-190309121061}"/>
+              </a:ext>
+            </a:extLst>
+          </p:cNvPr>
+          <p:cNvSpPr txBox="1"/>
+          <p:nvPr/>
+        </p:nvSpPr>
+        <p:spPr>
+          <a:xfrm>
+            <a:off x="4821382" y="1829997"/>
+            <a:ext cx="1800493" cy="369332"/>
+          </a:xfrm>
+          <a:prstGeom prst="rect">
+            <a:avLst/>
+          </a:prstGeom>
+          <a:noFill/>
+        </p:spPr>
+        <p:txBody>
+          <a:bodyPr wrap="none" rtlCol="0">
+            <a:spAutoFit/>
+          </a:bodyPr>
+          <a:lstStyle/>
+          <a:p>
+            <a:r>
+              <a:rPr kumimoji="1" lang="ja-JP" altLang="en-US" dirty="0"/>
+              <a:t>イメージ：勇者</a:t>
+            </a:r>
+          </a:p>
+        </p:txBody>
+      </p:sp>
+    </p:spTree>
+    <p:extLst>
+      <p:ext uri="{BB962C8B-B14F-4D97-AF65-F5344CB8AC3E}">
+        <p14:creationId xmlns:p14="http://schemas.microsoft.com/office/powerpoint/2010/main" val="776901126"/>
+      </p:ext>
+    </p:extLst>
+  </p:cSld>
+  <p:clrMapOvr>
+    <a:masterClrMapping/>
+  </p:clrMapOvr>
+</p:sld>
+</file>
+
+<file path=ppt/slides/slide4.xml><?xml version="1.0" encoding="utf-8"?>
+<p:sld xmlns:a="http://schemas.openxmlformats.org/drawingml/2006/main" xmlns:r="http://schemas.openxmlformats.org/officeDocument/2006/relationships" xmlns:p="http://schemas.openxmlformats.org/presentationml/2006/main">
+  <p:cSld>
+    <p:spTree>
+      <p:nvGrpSpPr>
+        <p:cNvPr id="1" name=""/>
+        <p:cNvGrpSpPr/>
+        <p:nvPr/>
+      </p:nvGrpSpPr>
+      <p:grpSpPr>
+        <a:xfrm>
+          <a:off x="0" y="0"/>
+          <a:ext cx="0" cy="0"/>
+          <a:chOff x="0" y="0"/>
+          <a:chExt cx="0" cy="0"/>
+        </a:xfrm>
+      </p:grpSpPr>
+      <p:sp>
+        <p:nvSpPr>
+          <p:cNvPr id="4" name="テキスト ボックス 3">
+            <a:extLst>
+              <a:ext uri="{FF2B5EF4-FFF2-40B4-BE49-F238E27FC236}">
+                <a16:creationId xmlns:a16="http://schemas.microsoft.com/office/drawing/2014/main" id="{CDB930A9-01B5-42D9-BBEE-3F2501F91D8D}"/>
+              </a:ext>
+            </a:extLst>
+          </p:cNvPr>
+          <p:cNvSpPr txBox="1"/>
+          <p:nvPr/>
+        </p:nvSpPr>
+        <p:spPr>
+          <a:xfrm>
+            <a:off x="1353787" y="1460665"/>
+            <a:ext cx="1569660" cy="369332"/>
+          </a:xfrm>
+          <a:prstGeom prst="rect">
+            <a:avLst/>
+          </a:prstGeom>
+          <a:noFill/>
+        </p:spPr>
+        <p:txBody>
+          <a:bodyPr wrap="none" rtlCol="0">
+            <a:spAutoFit/>
+          </a:bodyPr>
+          <a:lstStyle/>
+          <a:p>
+            <a:r>
+              <a:rPr kumimoji="1" lang="ja-JP" altLang="en-US" u="sng" dirty="0"/>
+              <a:t>速くて低耐久</a:t>
+            </a:r>
+          </a:p>
+        </p:txBody>
+      </p:sp>
+      <p:graphicFrame>
+        <p:nvGraphicFramePr>
+          <p:cNvPr id="6" name="表 6">
+            <a:extLst>
+              <a:ext uri="{FF2B5EF4-FFF2-40B4-BE49-F238E27FC236}">
+                <a16:creationId xmlns:a16="http://schemas.microsoft.com/office/drawing/2014/main" id="{ADFAA198-4C82-47B3-998F-E717146F6CA7}"/>
+              </a:ext>
+            </a:extLst>
+          </p:cNvPr>
+          <p:cNvGraphicFramePr>
+            <a:graphicFrameLocks noGrp="1"/>
+          </p:cNvGraphicFramePr>
+          <p:nvPr>
+            <p:extLst>
+              <p:ext uri="{D42A27DB-BD31-4B8C-83A1-F6EECF244321}">
+                <p14:modId xmlns:p14="http://schemas.microsoft.com/office/powerpoint/2010/main" val="4265835449"/>
+              </p:ext>
+            </p:extLst>
+          </p:nvPr>
+        </p:nvGraphicFramePr>
+        <p:xfrm>
+          <a:off x="1746993" y="2432124"/>
+          <a:ext cx="8128000" cy="3337560"/>
+        </p:xfrm>
+        <a:graphic>
+          <a:graphicData uri="http://schemas.openxmlformats.org/drawingml/2006/table">
+            <a:tbl>
+              <a:tblPr firstRow="1" bandRow="1">
+                <a:tableStyleId>{5C22544A-7EE6-4342-B048-85BDC9FD1C3A}</a:tableStyleId>
+              </a:tblPr>
+              <a:tblGrid>
+                <a:gridCol w="2575625">
+                  <a:extLst>
+                    <a:ext uri="{9D8B030D-6E8A-4147-A177-3AD203B41FA5}">
+                      <a16:colId xmlns:a16="http://schemas.microsoft.com/office/drawing/2014/main" val="2168610415"/>
+                    </a:ext>
+                  </a:extLst>
+                </a:gridCol>
+                <a:gridCol w="5552375">
+                  <a:extLst>
+                    <a:ext uri="{9D8B030D-6E8A-4147-A177-3AD203B41FA5}">
+                      <a16:colId xmlns:a16="http://schemas.microsoft.com/office/drawing/2014/main" val="3530299536"/>
+                    </a:ext>
+                  </a:extLst>
+                </a:gridCol>
+              </a:tblGrid>
+              <a:tr h="370840">
+                <a:tc>
+                  <a:txBody>
+                    <a:bodyPr/>
+                    <a:lstStyle/>
+                    <a:p>
+                      <a:endParaRPr kumimoji="1" lang="ja-JP" altLang="en-US" dirty="0"/>
+                    </a:p>
+                  </a:txBody>
+                  <a:tcPr/>
+                </a:tc>
+                <a:tc>
+                  <a:txBody>
+                    <a:bodyPr/>
+                    <a:lstStyle/>
+                    <a:p>
+                      <a:endParaRPr kumimoji="1" lang="ja-JP" altLang="en-US"/>
+                    </a:p>
+                  </a:txBody>
+                  <a:tcPr/>
+                </a:tc>
+                <a:extLst>
+                  <a:ext uri="{0D108BD9-81ED-4DB2-BD59-A6C34878D82A}">
+                    <a16:rowId xmlns:a16="http://schemas.microsoft.com/office/drawing/2014/main" val="287851579"/>
+                  </a:ext>
+                </a:extLst>
+              </a:tr>
+              <a:tr h="370840">
+                <a:tc>
+                  <a:txBody>
+                    <a:bodyPr/>
+                    <a:lstStyle/>
+                    <a:p>
+                      <a:r>
+                        <a:rPr kumimoji="1" lang="ja-JP" altLang="en-US" dirty="0"/>
+                        <a:t>体力</a:t>
+                      </a:r>
+                    </a:p>
+                  </a:txBody>
+                  <a:tcPr/>
+                </a:tc>
+                <a:tc>
+                  <a:txBody>
+                    <a:bodyPr/>
+                    <a:lstStyle/>
+                    <a:p>
+                      <a:r>
+                        <a:rPr kumimoji="1" lang="ja-JP" altLang="en-US" dirty="0"/>
+                        <a:t>低</a:t>
+                      </a:r>
+                    </a:p>
+                  </a:txBody>
+                  <a:tcPr/>
+                </a:tc>
+                <a:extLst>
+                  <a:ext uri="{0D108BD9-81ED-4DB2-BD59-A6C34878D82A}">
+                    <a16:rowId xmlns:a16="http://schemas.microsoft.com/office/drawing/2014/main" val="2179425768"/>
+                  </a:ext>
+                </a:extLst>
+              </a:tr>
+              <a:tr h="370840">
+                <a:tc>
+                  <a:txBody>
+                    <a:bodyPr/>
+                    <a:lstStyle/>
+                    <a:p>
+                      <a:r>
+                        <a:rPr kumimoji="1" lang="ja-JP" altLang="en-US" dirty="0"/>
+                        <a:t>攻撃力</a:t>
+                      </a:r>
+                    </a:p>
+                  </a:txBody>
+                  <a:tcPr/>
+                </a:tc>
+                <a:tc>
+                  <a:txBody>
+                    <a:bodyPr/>
+                    <a:lstStyle/>
+                    <a:p>
+                      <a:r>
+                        <a:rPr kumimoji="1" lang="ja-JP" altLang="en-US" dirty="0"/>
+                        <a:t>低</a:t>
+                      </a:r>
+                    </a:p>
+                  </a:txBody>
+                  <a:tcPr/>
+                </a:tc>
+                <a:extLst>
+                  <a:ext uri="{0D108BD9-81ED-4DB2-BD59-A6C34878D82A}">
+                    <a16:rowId xmlns:a16="http://schemas.microsoft.com/office/drawing/2014/main" val="2170705841"/>
+                  </a:ext>
+                </a:extLst>
+              </a:tr>
+              <a:tr h="370840">
+                <a:tc>
+                  <a:txBody>
+                    <a:bodyPr/>
+                    <a:lstStyle/>
+                    <a:p>
+                      <a:r>
+                        <a:rPr kumimoji="1" lang="ja-JP" altLang="en-US" dirty="0"/>
+                        <a:t>素早さ</a:t>
+                      </a:r>
+                    </a:p>
+                  </a:txBody>
+                  <a:tcPr/>
+                </a:tc>
+                <a:tc>
+                  <a:txBody>
+                    <a:bodyPr/>
+                    <a:lstStyle/>
+                    <a:p>
+                      <a:r>
+                        <a:rPr kumimoji="1" lang="ja-JP" altLang="en-US" dirty="0"/>
+                        <a:t>高</a:t>
+                      </a:r>
+                    </a:p>
+                  </a:txBody>
+                  <a:tcPr/>
+                </a:tc>
+                <a:extLst>
+                  <a:ext uri="{0D108BD9-81ED-4DB2-BD59-A6C34878D82A}">
+                    <a16:rowId xmlns:a16="http://schemas.microsoft.com/office/drawing/2014/main" val="1438526933"/>
+                  </a:ext>
+                </a:extLst>
+              </a:tr>
+              <a:tr h="370840">
+                <a:tc>
+                  <a:txBody>
+                    <a:bodyPr/>
+                    <a:lstStyle/>
+                    <a:p>
+                      <a:r>
+                        <a:rPr kumimoji="1" lang="ja-JP" altLang="en-US" dirty="0"/>
+                        <a:t>通常攻撃</a:t>
+                      </a:r>
+                    </a:p>
+                  </a:txBody>
+                  <a:tcPr/>
+                </a:tc>
+                <a:tc>
+                  <a:txBody>
+                    <a:bodyPr/>
+                    <a:lstStyle/>
+                    <a:p>
+                      <a:r>
+                        <a:rPr kumimoji="1" lang="ja-JP" altLang="en-US" dirty="0"/>
+                        <a:t>ナイフによる近接攻撃　硬直時間：極小</a:t>
+                      </a:r>
+                    </a:p>
+                  </a:txBody>
+                  <a:tcPr/>
+                </a:tc>
+                <a:extLst>
+                  <a:ext uri="{0D108BD9-81ED-4DB2-BD59-A6C34878D82A}">
+                    <a16:rowId xmlns:a16="http://schemas.microsoft.com/office/drawing/2014/main" val="391020856"/>
+                  </a:ext>
+                </a:extLst>
+              </a:tr>
+              <a:tr h="370840">
+                <a:tc>
+                  <a:txBody>
+                    <a:bodyPr/>
+                    <a:lstStyle/>
+                    <a:p>
+                      <a:r>
+                        <a:rPr kumimoji="1" lang="ja-JP" altLang="en-US" dirty="0"/>
+                        <a:t>スキル</a:t>
+                      </a:r>
+                    </a:p>
+                  </a:txBody>
+                  <a:tcPr/>
+                </a:tc>
+                <a:tc>
+                  <a:txBody>
+                    <a:bodyPr/>
+                    <a:lstStyle/>
+                    <a:p>
+                      <a:r>
+                        <a:rPr kumimoji="1" lang="ja-JP" altLang="en-US" dirty="0"/>
+                        <a:t>一定時間姿を消す</a:t>
+                      </a:r>
+                    </a:p>
+                  </a:txBody>
+                  <a:tcPr/>
+                </a:tc>
+                <a:extLst>
+                  <a:ext uri="{0D108BD9-81ED-4DB2-BD59-A6C34878D82A}">
+                    <a16:rowId xmlns:a16="http://schemas.microsoft.com/office/drawing/2014/main" val="969716069"/>
+                  </a:ext>
+                </a:extLst>
+              </a:tr>
+              <a:tr h="370840">
+                <a:tc>
+                  <a:txBody>
+                    <a:bodyPr/>
+                    <a:lstStyle/>
+                    <a:p>
+                      <a:r>
+                        <a:rPr kumimoji="1" lang="ja-JP" altLang="en-US" dirty="0"/>
+                        <a:t>必殺技</a:t>
+                      </a:r>
+                    </a:p>
+                  </a:txBody>
+                  <a:tcPr/>
+                </a:tc>
+                <a:tc>
+                  <a:txBody>
+                    <a:bodyPr/>
+                    <a:lstStyle/>
+                    <a:p>
+                      <a:r>
+                        <a:rPr kumimoji="1" lang="ja-JP" altLang="en-US" dirty="0"/>
+                        <a:t>ナイフを投げて長射程攻撃　</a:t>
+                      </a:r>
+                      <a:r>
+                        <a:rPr kumimoji="1" lang="en-US" altLang="ja-JP" dirty="0"/>
+                        <a:t>5</a:t>
+                      </a:r>
+                      <a:r>
+                        <a:rPr kumimoji="1" lang="ja-JP" altLang="en-US" dirty="0"/>
+                        <a:t>～１０発ぐらい</a:t>
+                      </a:r>
+                    </a:p>
+                  </a:txBody>
+                  <a:tcPr/>
+                </a:tc>
+                <a:extLst>
+                  <a:ext uri="{0D108BD9-81ED-4DB2-BD59-A6C34878D82A}">
+                    <a16:rowId xmlns:a16="http://schemas.microsoft.com/office/drawing/2014/main" val="3820238464"/>
+                  </a:ext>
+                </a:extLst>
+              </a:tr>
+              <a:tr h="370840">
+                <a:tc>
+                  <a:txBody>
+                    <a:bodyPr/>
+                    <a:lstStyle/>
+                    <a:p>
+                      <a:r>
+                        <a:rPr kumimoji="1" lang="ja-JP" altLang="en-US" dirty="0"/>
+                        <a:t>解放されるタイミング</a:t>
+                      </a:r>
+                    </a:p>
+                  </a:txBody>
+                  <a:tcPr/>
+                </a:tc>
+                <a:tc>
+                  <a:txBody>
+                    <a:bodyPr/>
+                    <a:lstStyle/>
+                    <a:p>
+                      <a:r>
+                        <a:rPr kumimoji="1" lang="ja-JP" altLang="en-US" dirty="0"/>
+                        <a:t>序盤</a:t>
+                      </a:r>
+                    </a:p>
+                  </a:txBody>
+                  <a:tcPr/>
+                </a:tc>
+                <a:extLst>
+                  <a:ext uri="{0D108BD9-81ED-4DB2-BD59-A6C34878D82A}">
+                    <a16:rowId xmlns:a16="http://schemas.microsoft.com/office/drawing/2014/main" val="4086754404"/>
+                  </a:ext>
+                </a:extLst>
+              </a:tr>
+              <a:tr h="370840">
+                <a:tc>
+                  <a:txBody>
+                    <a:bodyPr/>
+                    <a:lstStyle/>
+                    <a:p>
+                      <a:r>
+                        <a:rPr kumimoji="1" lang="ja-JP" altLang="en-US" dirty="0"/>
+                        <a:t>備考</a:t>
+                      </a:r>
+                    </a:p>
+                  </a:txBody>
+                  <a:tcPr/>
+                </a:tc>
+                <a:tc>
+                  <a:txBody>
+                    <a:bodyPr/>
+                    <a:lstStyle/>
+                    <a:p>
+                      <a:r>
+                        <a:rPr kumimoji="1" lang="ja-JP" altLang="en-US" dirty="0"/>
+                        <a:t>スキル使用時は味方からは半透明で見える</a:t>
+                      </a:r>
+                    </a:p>
+                  </a:txBody>
+                  <a:tcPr/>
+                </a:tc>
+                <a:extLst>
+                  <a:ext uri="{0D108BD9-81ED-4DB2-BD59-A6C34878D82A}">
+                    <a16:rowId xmlns:a16="http://schemas.microsoft.com/office/drawing/2014/main" val="1182665698"/>
+                  </a:ext>
+                </a:extLst>
+              </a:tr>
+            </a:tbl>
+          </a:graphicData>
+        </a:graphic>
+      </p:graphicFrame>
+      <p:sp>
+        <p:nvSpPr>
+          <p:cNvPr id="5" name="テキスト ボックス 4">
+            <a:extLst>
+              <a:ext uri="{FF2B5EF4-FFF2-40B4-BE49-F238E27FC236}">
+                <a16:creationId xmlns:a16="http://schemas.microsoft.com/office/drawing/2014/main" id="{8C7BF306-8508-4A5E-98AD-895246A1CAC1}"/>
+              </a:ext>
+            </a:extLst>
+          </p:cNvPr>
+          <p:cNvSpPr txBox="1"/>
+          <p:nvPr/>
+        </p:nvSpPr>
+        <p:spPr>
+          <a:xfrm>
+            <a:off x="4821382" y="1829997"/>
+            <a:ext cx="1800493" cy="369332"/>
+          </a:xfrm>
+          <a:prstGeom prst="rect">
+            <a:avLst/>
+          </a:prstGeom>
+          <a:noFill/>
+        </p:spPr>
+        <p:txBody>
+          <a:bodyPr wrap="none" rtlCol="0">
+            <a:spAutoFit/>
+          </a:bodyPr>
+          <a:lstStyle/>
+          <a:p>
+            <a:r>
+              <a:rPr kumimoji="1" lang="ja-JP" altLang="en-US" dirty="0"/>
+              <a:t>イメージ：忍者</a:t>
+            </a:r>
+          </a:p>
+        </p:txBody>
+      </p:sp>
+    </p:spTree>
+    <p:extLst>
+      <p:ext uri="{BB962C8B-B14F-4D97-AF65-F5344CB8AC3E}">
+        <p14:creationId xmlns:p14="http://schemas.microsoft.com/office/powerpoint/2010/main" val="3538850053"/>
+      </p:ext>
+    </p:extLst>
+  </p:cSld>
+  <p:clrMapOvr>
+    <a:masterClrMapping/>
+  </p:clrMapOvr>
+</p:sld>
+</file>
+
+<file path=ppt/slides/slide5.xml><?xml version="1.0" encoding="utf-8"?>
+<p:sld xmlns:a="http://schemas.openxmlformats.org/drawingml/2006/main" xmlns:r="http://schemas.openxmlformats.org/officeDocument/2006/relationships" xmlns:p="http://schemas.openxmlformats.org/presentationml/2006/main">
+  <p:cSld>
+    <p:spTree>
+      <p:nvGrpSpPr>
+        <p:cNvPr id="1" name=""/>
+        <p:cNvGrpSpPr/>
+        <p:nvPr/>
+      </p:nvGrpSpPr>
+      <p:grpSpPr>
+        <a:xfrm>
+          <a:off x="0" y="0"/>
+          <a:ext cx="0" cy="0"/>
+          <a:chOff x="0" y="0"/>
+          <a:chExt cx="0" cy="0"/>
+        </a:xfrm>
+      </p:grpSpPr>
+      <p:sp>
+        <p:nvSpPr>
+          <p:cNvPr id="4" name="テキスト ボックス 3">
+            <a:extLst>
+              <a:ext uri="{FF2B5EF4-FFF2-40B4-BE49-F238E27FC236}">
+                <a16:creationId xmlns:a16="http://schemas.microsoft.com/office/drawing/2014/main" id="{CDB930A9-01B5-42D9-BBEE-3F2501F91D8D}"/>
+              </a:ext>
+            </a:extLst>
+          </p:cNvPr>
+          <p:cNvSpPr txBox="1"/>
+          <p:nvPr/>
+        </p:nvSpPr>
+        <p:spPr>
+          <a:xfrm>
+            <a:off x="1353787" y="1460665"/>
+            <a:ext cx="1569660" cy="369332"/>
+          </a:xfrm>
+          <a:prstGeom prst="rect">
+            <a:avLst/>
+          </a:prstGeom>
+          <a:noFill/>
+        </p:spPr>
+        <p:txBody>
+          <a:bodyPr wrap="none" rtlCol="0">
+            <a:spAutoFit/>
+          </a:bodyPr>
+          <a:lstStyle/>
+          <a:p>
+            <a:r>
+              <a:rPr kumimoji="1" lang="ja-JP" altLang="en-US" u="sng" dirty="0"/>
+              <a:t>遅くて高耐久</a:t>
+            </a:r>
+          </a:p>
+        </p:txBody>
+      </p:sp>
+      <p:graphicFrame>
+        <p:nvGraphicFramePr>
+          <p:cNvPr id="6" name="表 6">
+            <a:extLst>
+              <a:ext uri="{FF2B5EF4-FFF2-40B4-BE49-F238E27FC236}">
+                <a16:creationId xmlns:a16="http://schemas.microsoft.com/office/drawing/2014/main" id="{ADFAA198-4C82-47B3-998F-E717146F6CA7}"/>
+              </a:ext>
+            </a:extLst>
+          </p:cNvPr>
+          <p:cNvGraphicFramePr>
+            <a:graphicFrameLocks noGrp="1"/>
+          </p:cNvGraphicFramePr>
+          <p:nvPr>
+            <p:extLst>
+              <p:ext uri="{D42A27DB-BD31-4B8C-83A1-F6EECF244321}">
+                <p14:modId xmlns:p14="http://schemas.microsoft.com/office/powerpoint/2010/main" val="3830246919"/>
+              </p:ext>
+            </p:extLst>
+          </p:nvPr>
+        </p:nvGraphicFramePr>
+        <p:xfrm>
+          <a:off x="1746993" y="2432124"/>
+          <a:ext cx="8128000" cy="3337560"/>
+        </p:xfrm>
+        <a:graphic>
+          <a:graphicData uri="http://schemas.openxmlformats.org/drawingml/2006/table">
+            <a:tbl>
+              <a:tblPr firstRow="1" bandRow="1">
+                <a:tableStyleId>{5C22544A-7EE6-4342-B048-85BDC9FD1C3A}</a:tableStyleId>
+              </a:tblPr>
+              <a:tblGrid>
+                <a:gridCol w="2575625">
+                  <a:extLst>
+                    <a:ext uri="{9D8B030D-6E8A-4147-A177-3AD203B41FA5}">
+                      <a16:colId xmlns:a16="http://schemas.microsoft.com/office/drawing/2014/main" val="2168610415"/>
+                    </a:ext>
+                  </a:extLst>
+                </a:gridCol>
+                <a:gridCol w="5552375">
+                  <a:extLst>
+                    <a:ext uri="{9D8B030D-6E8A-4147-A177-3AD203B41FA5}">
+                      <a16:colId xmlns:a16="http://schemas.microsoft.com/office/drawing/2014/main" val="3530299536"/>
+                    </a:ext>
+                  </a:extLst>
+                </a:gridCol>
+              </a:tblGrid>
+              <a:tr h="370840">
+                <a:tc>
+                  <a:txBody>
+                    <a:bodyPr/>
+                    <a:lstStyle/>
+                    <a:p>
+                      <a:endParaRPr kumimoji="1" lang="ja-JP" altLang="en-US" dirty="0"/>
+                    </a:p>
+                  </a:txBody>
+                  <a:tcPr/>
+                </a:tc>
+                <a:tc>
+                  <a:txBody>
+                    <a:bodyPr/>
+                    <a:lstStyle/>
+                    <a:p>
+                      <a:endParaRPr kumimoji="1" lang="ja-JP" altLang="en-US"/>
+                    </a:p>
+                  </a:txBody>
+                  <a:tcPr/>
+                </a:tc>
+                <a:extLst>
+                  <a:ext uri="{0D108BD9-81ED-4DB2-BD59-A6C34878D82A}">
+                    <a16:rowId xmlns:a16="http://schemas.microsoft.com/office/drawing/2014/main" val="287851579"/>
+                  </a:ext>
+                </a:extLst>
+              </a:tr>
+              <a:tr h="370840">
+                <a:tc>
+                  <a:txBody>
+                    <a:bodyPr/>
+                    <a:lstStyle/>
+                    <a:p>
+                      <a:r>
+                        <a:rPr kumimoji="1" lang="ja-JP" altLang="en-US" dirty="0"/>
+                        <a:t>体力</a:t>
+                      </a:r>
+                    </a:p>
+                  </a:txBody>
+                  <a:tcPr/>
+                </a:tc>
+                <a:tc>
+                  <a:txBody>
+                    <a:bodyPr/>
+                    <a:lstStyle/>
+                    <a:p>
+                      <a:r>
+                        <a:rPr kumimoji="1" lang="ja-JP" altLang="en-US" dirty="0"/>
+                        <a:t>高</a:t>
+                      </a:r>
+                    </a:p>
+                  </a:txBody>
+                  <a:tcPr/>
+                </a:tc>
+                <a:extLst>
+                  <a:ext uri="{0D108BD9-81ED-4DB2-BD59-A6C34878D82A}">
+                    <a16:rowId xmlns:a16="http://schemas.microsoft.com/office/drawing/2014/main" val="2179425768"/>
+                  </a:ext>
+                </a:extLst>
+              </a:tr>
+              <a:tr h="370840">
+                <a:tc>
+                  <a:txBody>
+                    <a:bodyPr/>
+                    <a:lstStyle/>
+                    <a:p>
+                      <a:r>
+                        <a:rPr kumimoji="1" lang="ja-JP" altLang="en-US" dirty="0"/>
+                        <a:t>攻撃力</a:t>
+                      </a:r>
+                    </a:p>
+                  </a:txBody>
+                  <a:tcPr/>
+                </a:tc>
+                <a:tc>
+                  <a:txBody>
+                    <a:bodyPr/>
+                    <a:lstStyle/>
+                    <a:p>
+                      <a:r>
+                        <a:rPr kumimoji="1" lang="ja-JP" altLang="en-US" dirty="0"/>
+                        <a:t>中</a:t>
+                      </a:r>
+                    </a:p>
+                  </a:txBody>
+                  <a:tcPr/>
+                </a:tc>
+                <a:extLst>
+                  <a:ext uri="{0D108BD9-81ED-4DB2-BD59-A6C34878D82A}">
+                    <a16:rowId xmlns:a16="http://schemas.microsoft.com/office/drawing/2014/main" val="2170705841"/>
+                  </a:ext>
+                </a:extLst>
+              </a:tr>
+              <a:tr h="370840">
+                <a:tc>
+                  <a:txBody>
+                    <a:bodyPr/>
+                    <a:lstStyle/>
+                    <a:p>
+                      <a:r>
+                        <a:rPr kumimoji="1" lang="ja-JP" altLang="en-US" dirty="0"/>
+                        <a:t>素早さ</a:t>
+                      </a:r>
+                    </a:p>
+                  </a:txBody>
+                  <a:tcPr/>
+                </a:tc>
+                <a:tc>
+                  <a:txBody>
+                    <a:bodyPr/>
+                    <a:lstStyle/>
+                    <a:p>
+                      <a:r>
+                        <a:rPr kumimoji="1" lang="ja-JP" altLang="en-US" dirty="0"/>
+                        <a:t>低</a:t>
+                      </a:r>
+                    </a:p>
+                  </a:txBody>
+                  <a:tcPr/>
+                </a:tc>
+                <a:extLst>
+                  <a:ext uri="{0D108BD9-81ED-4DB2-BD59-A6C34878D82A}">
+                    <a16:rowId xmlns:a16="http://schemas.microsoft.com/office/drawing/2014/main" val="1438526933"/>
+                  </a:ext>
+                </a:extLst>
+              </a:tr>
+              <a:tr h="370840">
+                <a:tc>
+                  <a:txBody>
+                    <a:bodyPr/>
+                    <a:lstStyle/>
+                    <a:p>
+                      <a:r>
+                        <a:rPr kumimoji="1" lang="ja-JP" altLang="en-US" dirty="0"/>
+                        <a:t>通常攻撃</a:t>
+                      </a:r>
+                    </a:p>
+                  </a:txBody>
+                  <a:tcPr/>
+                </a:tc>
+                <a:tc>
+                  <a:txBody>
+                    <a:bodyPr/>
+                    <a:lstStyle/>
+                    <a:p>
+                      <a:r>
+                        <a:rPr kumimoji="1" lang="ja-JP" altLang="en-US" dirty="0"/>
+                        <a:t>パンチによる近接攻撃　硬直時間：長</a:t>
+                      </a:r>
+                    </a:p>
+                  </a:txBody>
+                  <a:tcPr/>
+                </a:tc>
+                <a:extLst>
+                  <a:ext uri="{0D108BD9-81ED-4DB2-BD59-A6C34878D82A}">
+                    <a16:rowId xmlns:a16="http://schemas.microsoft.com/office/drawing/2014/main" val="391020856"/>
+                  </a:ext>
+                </a:extLst>
+              </a:tr>
+              <a:tr h="370840">
+                <a:tc>
+                  <a:txBody>
+                    <a:bodyPr/>
+                    <a:lstStyle/>
+                    <a:p>
+                      <a:r>
+                        <a:rPr kumimoji="1" lang="ja-JP" altLang="en-US" dirty="0"/>
+                        <a:t>スキル</a:t>
+                      </a:r>
+                    </a:p>
+                  </a:txBody>
+                  <a:tcPr/>
+                </a:tc>
+                <a:tc>
+                  <a:txBody>
+                    <a:bodyPr/>
+                    <a:lstStyle/>
+                    <a:p>
+                      <a:r>
+                        <a:rPr kumimoji="1" lang="ja-JP" altLang="en-US" dirty="0"/>
+                        <a:t>一定時間被ダメージを軽減</a:t>
+                      </a:r>
+                    </a:p>
+                  </a:txBody>
+                  <a:tcPr/>
+                </a:tc>
+                <a:extLst>
+                  <a:ext uri="{0D108BD9-81ED-4DB2-BD59-A6C34878D82A}">
+                    <a16:rowId xmlns:a16="http://schemas.microsoft.com/office/drawing/2014/main" val="969716069"/>
+                  </a:ext>
+                </a:extLst>
+              </a:tr>
+              <a:tr h="370840">
+                <a:tc>
+                  <a:txBody>
+                    <a:bodyPr/>
+                    <a:lstStyle/>
+                    <a:p>
+                      <a:r>
+                        <a:rPr kumimoji="1" lang="ja-JP" altLang="en-US" dirty="0"/>
+                        <a:t>必殺技</a:t>
+                      </a:r>
+                    </a:p>
+                  </a:txBody>
+                  <a:tcPr/>
+                </a:tc>
+                <a:tc>
+                  <a:txBody>
+                    <a:bodyPr/>
+                    <a:lstStyle/>
+                    <a:p>
+                      <a:r>
+                        <a:rPr kumimoji="1" lang="ja-JP" altLang="en-US" dirty="0"/>
+                        <a:t>のしかかって攻撃　タメあり　硬直長め</a:t>
+                      </a:r>
+                    </a:p>
+                  </a:txBody>
+                  <a:tcPr/>
+                </a:tc>
+                <a:extLst>
+                  <a:ext uri="{0D108BD9-81ED-4DB2-BD59-A6C34878D82A}">
+                    <a16:rowId xmlns:a16="http://schemas.microsoft.com/office/drawing/2014/main" val="3820238464"/>
+                  </a:ext>
+                </a:extLst>
+              </a:tr>
+              <a:tr h="370840">
+                <a:tc>
+                  <a:txBody>
+                    <a:bodyPr/>
+                    <a:lstStyle/>
+                    <a:p>
+                      <a:r>
+                        <a:rPr kumimoji="1" lang="ja-JP" altLang="en-US" dirty="0"/>
+                        <a:t>解放されるタイミング</a:t>
+                      </a:r>
+                    </a:p>
+                  </a:txBody>
+                  <a:tcPr/>
+                </a:tc>
+                <a:tc>
+                  <a:txBody>
+                    <a:bodyPr/>
+                    <a:lstStyle/>
+                    <a:p>
+                      <a:r>
+                        <a:rPr kumimoji="1" lang="ja-JP" altLang="en-US" dirty="0"/>
+                        <a:t>序盤</a:t>
+                      </a:r>
+                    </a:p>
+                  </a:txBody>
+                  <a:tcPr/>
+                </a:tc>
+                <a:extLst>
+                  <a:ext uri="{0D108BD9-81ED-4DB2-BD59-A6C34878D82A}">
+                    <a16:rowId xmlns:a16="http://schemas.microsoft.com/office/drawing/2014/main" val="4086754404"/>
+                  </a:ext>
+                </a:extLst>
+              </a:tr>
+              <a:tr h="370840">
+                <a:tc>
+                  <a:txBody>
+                    <a:bodyPr/>
+                    <a:lstStyle/>
+                    <a:p>
+                      <a:r>
+                        <a:rPr kumimoji="1" lang="ja-JP" altLang="en-US" dirty="0"/>
+                        <a:t>備考</a:t>
+                      </a:r>
+                    </a:p>
+                  </a:txBody>
+                  <a:tcPr/>
+                </a:tc>
+                <a:tc>
+                  <a:txBody>
+                    <a:bodyPr/>
+                    <a:lstStyle/>
+                    <a:p>
+                      <a:endParaRPr kumimoji="1" lang="ja-JP" altLang="en-US" dirty="0"/>
+                    </a:p>
+                  </a:txBody>
+                  <a:tcPr/>
+                </a:tc>
+                <a:extLst>
+                  <a:ext uri="{0D108BD9-81ED-4DB2-BD59-A6C34878D82A}">
+                    <a16:rowId xmlns:a16="http://schemas.microsoft.com/office/drawing/2014/main" val="1182665698"/>
+                  </a:ext>
+                </a:extLst>
+              </a:tr>
+            </a:tbl>
+          </a:graphicData>
+        </a:graphic>
+      </p:graphicFrame>
+      <p:sp>
+        <p:nvSpPr>
+          <p:cNvPr id="5" name="テキスト ボックス 4">
+            <a:extLst>
+              <a:ext uri="{FF2B5EF4-FFF2-40B4-BE49-F238E27FC236}">
+                <a16:creationId xmlns:a16="http://schemas.microsoft.com/office/drawing/2014/main" id="{B4983D67-C329-4A79-A624-464A410881FC}"/>
+              </a:ext>
+            </a:extLst>
+          </p:cNvPr>
+          <p:cNvSpPr txBox="1"/>
+          <p:nvPr/>
+        </p:nvSpPr>
+        <p:spPr>
+          <a:xfrm>
+            <a:off x="4821382" y="1829997"/>
+            <a:ext cx="2262158" cy="369332"/>
+          </a:xfrm>
+          <a:prstGeom prst="rect">
+            <a:avLst/>
+          </a:prstGeom>
+          <a:noFill/>
+        </p:spPr>
+        <p:txBody>
+          <a:bodyPr wrap="none" rtlCol="0">
+            <a:spAutoFit/>
+          </a:bodyPr>
+          <a:lstStyle/>
+          <a:p>
+            <a:r>
+              <a:rPr kumimoji="1" lang="ja-JP" altLang="en-US" dirty="0"/>
+              <a:t>イメージ：ゴーレム</a:t>
+            </a:r>
+          </a:p>
+        </p:txBody>
+      </p:sp>
+    </p:spTree>
+    <p:extLst>
+      <p:ext uri="{BB962C8B-B14F-4D97-AF65-F5344CB8AC3E}">
+        <p14:creationId xmlns:p14="http://schemas.microsoft.com/office/powerpoint/2010/main" val="2322425682"/>
+      </p:ext>
+    </p:extLst>
+  </p:cSld>
+  <p:clrMapOvr>
+    <a:masterClrMapping/>
+  </p:clrMapOvr>
+</p:sld>
+</file>
+
+<file path=ppt/slides/slide6.xml><?xml version="1.0" encoding="utf-8"?>
+<p:sld xmlns:a="http://schemas.openxmlformats.org/drawingml/2006/main" xmlns:r="http://schemas.openxmlformats.org/officeDocument/2006/relationships" xmlns:p="http://schemas.openxmlformats.org/presentationml/2006/main">
+  <p:cSld>
+    <p:spTree>
+      <p:nvGrpSpPr>
+        <p:cNvPr id="1" name=""/>
+        <p:cNvGrpSpPr/>
+        <p:nvPr/>
+      </p:nvGrpSpPr>
+      <p:grpSpPr>
+        <a:xfrm>
+          <a:off x="0" y="0"/>
+          <a:ext cx="0" cy="0"/>
+          <a:chOff x="0" y="0"/>
+          <a:chExt cx="0" cy="0"/>
+        </a:xfrm>
+      </p:grpSpPr>
+      <p:sp>
+        <p:nvSpPr>
+          <p:cNvPr id="4" name="テキスト ボックス 3">
+            <a:extLst>
+              <a:ext uri="{FF2B5EF4-FFF2-40B4-BE49-F238E27FC236}">
+                <a16:creationId xmlns:a16="http://schemas.microsoft.com/office/drawing/2014/main" id="{CDB930A9-01B5-42D9-BBEE-3F2501F91D8D}"/>
+              </a:ext>
+            </a:extLst>
+          </p:cNvPr>
+          <p:cNvSpPr txBox="1"/>
+          <p:nvPr/>
+        </p:nvSpPr>
+        <p:spPr>
+          <a:xfrm>
+            <a:off x="1353787" y="1460665"/>
+            <a:ext cx="2031325" cy="369332"/>
+          </a:xfrm>
+          <a:prstGeom prst="rect">
+            <a:avLst/>
+          </a:prstGeom>
+          <a:noFill/>
+        </p:spPr>
+        <p:txBody>
+          <a:bodyPr wrap="none" rtlCol="0">
+            <a:spAutoFit/>
+          </a:bodyPr>
+          <a:lstStyle/>
+          <a:p>
+            <a:r>
+              <a:rPr kumimoji="1" lang="ja-JP" altLang="en-US" u="sng" dirty="0"/>
+              <a:t>能力低くて長射程</a:t>
+            </a:r>
+          </a:p>
+        </p:txBody>
+      </p:sp>
+      <p:graphicFrame>
+        <p:nvGraphicFramePr>
+          <p:cNvPr id="6" name="表 6">
+            <a:extLst>
+              <a:ext uri="{FF2B5EF4-FFF2-40B4-BE49-F238E27FC236}">
+                <a16:creationId xmlns:a16="http://schemas.microsoft.com/office/drawing/2014/main" id="{ADFAA198-4C82-47B3-998F-E717146F6CA7}"/>
+              </a:ext>
+            </a:extLst>
+          </p:cNvPr>
+          <p:cNvGraphicFramePr>
+            <a:graphicFrameLocks noGrp="1"/>
+          </p:cNvGraphicFramePr>
+          <p:nvPr>
+            <p:extLst>
+              <p:ext uri="{D42A27DB-BD31-4B8C-83A1-F6EECF244321}">
+                <p14:modId xmlns:p14="http://schemas.microsoft.com/office/powerpoint/2010/main" val="3272710213"/>
+              </p:ext>
+            </p:extLst>
+          </p:nvPr>
+        </p:nvGraphicFramePr>
+        <p:xfrm>
+          <a:off x="1746993" y="2432124"/>
+          <a:ext cx="8128000" cy="3337560"/>
+        </p:xfrm>
+        <a:graphic>
+          <a:graphicData uri="http://schemas.openxmlformats.org/drawingml/2006/table">
+            <a:tbl>
+              <a:tblPr firstRow="1" bandRow="1">
+                <a:tableStyleId>{5C22544A-7EE6-4342-B048-85BDC9FD1C3A}</a:tableStyleId>
+              </a:tblPr>
+              <a:tblGrid>
+                <a:gridCol w="2575625">
+                  <a:extLst>
+                    <a:ext uri="{9D8B030D-6E8A-4147-A177-3AD203B41FA5}">
+                      <a16:colId xmlns:a16="http://schemas.microsoft.com/office/drawing/2014/main" val="2168610415"/>
+                    </a:ext>
+                  </a:extLst>
+                </a:gridCol>
+                <a:gridCol w="5552375">
+                  <a:extLst>
+                    <a:ext uri="{9D8B030D-6E8A-4147-A177-3AD203B41FA5}">
+                      <a16:colId xmlns:a16="http://schemas.microsoft.com/office/drawing/2014/main" val="3530299536"/>
+                    </a:ext>
+                  </a:extLst>
+                </a:gridCol>
+              </a:tblGrid>
+              <a:tr h="370840">
+                <a:tc>
+                  <a:txBody>
+                    <a:bodyPr/>
+                    <a:lstStyle/>
+                    <a:p>
+                      <a:endParaRPr kumimoji="1" lang="ja-JP" altLang="en-US" dirty="0"/>
+                    </a:p>
+                  </a:txBody>
+                  <a:tcPr/>
+                </a:tc>
+                <a:tc>
+                  <a:txBody>
+                    <a:bodyPr/>
+                    <a:lstStyle/>
+                    <a:p>
+                      <a:endParaRPr kumimoji="1" lang="ja-JP" altLang="en-US"/>
+                    </a:p>
+                  </a:txBody>
+                  <a:tcPr/>
+                </a:tc>
+                <a:extLst>
+                  <a:ext uri="{0D108BD9-81ED-4DB2-BD59-A6C34878D82A}">
+                    <a16:rowId xmlns:a16="http://schemas.microsoft.com/office/drawing/2014/main" val="287851579"/>
+                  </a:ext>
+                </a:extLst>
+              </a:tr>
+              <a:tr h="370840">
+                <a:tc>
+                  <a:txBody>
+                    <a:bodyPr/>
+                    <a:lstStyle/>
+                    <a:p>
+                      <a:r>
+                        <a:rPr kumimoji="1" lang="ja-JP" altLang="en-US" dirty="0"/>
+                        <a:t>体力</a:t>
+                      </a:r>
+                    </a:p>
+                  </a:txBody>
+                  <a:tcPr/>
+                </a:tc>
+                <a:tc>
+                  <a:txBody>
+                    <a:bodyPr/>
+                    <a:lstStyle/>
+                    <a:p>
+                      <a:r>
+                        <a:rPr kumimoji="1" lang="ja-JP" altLang="en-US" dirty="0"/>
+                        <a:t>低</a:t>
+                      </a:r>
+                    </a:p>
+                  </a:txBody>
+                  <a:tcPr/>
+                </a:tc>
+                <a:extLst>
+                  <a:ext uri="{0D108BD9-81ED-4DB2-BD59-A6C34878D82A}">
+                    <a16:rowId xmlns:a16="http://schemas.microsoft.com/office/drawing/2014/main" val="2179425768"/>
+                  </a:ext>
+                </a:extLst>
+              </a:tr>
+              <a:tr h="370840">
+                <a:tc>
+                  <a:txBody>
+                    <a:bodyPr/>
+                    <a:lstStyle/>
+                    <a:p>
+                      <a:r>
+                        <a:rPr kumimoji="1" lang="ja-JP" altLang="en-US" dirty="0"/>
+                        <a:t>攻撃力</a:t>
+                      </a:r>
+                    </a:p>
+                  </a:txBody>
+                  <a:tcPr/>
+                </a:tc>
+                <a:tc>
+                  <a:txBody>
+                    <a:bodyPr/>
+                    <a:lstStyle/>
+                    <a:p>
+                      <a:r>
+                        <a:rPr kumimoji="1" lang="ja-JP" altLang="en-US" dirty="0"/>
+                        <a:t>低</a:t>
+                      </a:r>
+                    </a:p>
+                  </a:txBody>
+                  <a:tcPr/>
+                </a:tc>
+                <a:extLst>
+                  <a:ext uri="{0D108BD9-81ED-4DB2-BD59-A6C34878D82A}">
+                    <a16:rowId xmlns:a16="http://schemas.microsoft.com/office/drawing/2014/main" val="2170705841"/>
+                  </a:ext>
+                </a:extLst>
+              </a:tr>
+              <a:tr h="370840">
+                <a:tc>
+                  <a:txBody>
+                    <a:bodyPr/>
+                    <a:lstStyle/>
+                    <a:p>
+                      <a:r>
+                        <a:rPr kumimoji="1" lang="ja-JP" altLang="en-US" dirty="0"/>
+                        <a:t>素早さ</a:t>
+                      </a:r>
+                    </a:p>
+                  </a:txBody>
+                  <a:tcPr/>
+                </a:tc>
+                <a:tc>
+                  <a:txBody>
+                    <a:bodyPr/>
+                    <a:lstStyle/>
+                    <a:p>
+                      <a:r>
+                        <a:rPr kumimoji="1" lang="ja-JP" altLang="en-US" dirty="0"/>
+                        <a:t>中</a:t>
+                      </a:r>
+                    </a:p>
+                  </a:txBody>
+                  <a:tcPr/>
+                </a:tc>
+                <a:extLst>
+                  <a:ext uri="{0D108BD9-81ED-4DB2-BD59-A6C34878D82A}">
+                    <a16:rowId xmlns:a16="http://schemas.microsoft.com/office/drawing/2014/main" val="1438526933"/>
+                  </a:ext>
+                </a:extLst>
+              </a:tr>
+              <a:tr h="370840">
+                <a:tc>
+                  <a:txBody>
+                    <a:bodyPr/>
+                    <a:lstStyle/>
+                    <a:p>
+                      <a:r>
+                        <a:rPr kumimoji="1" lang="ja-JP" altLang="en-US" dirty="0"/>
+                        <a:t>通常攻撃</a:t>
+                      </a:r>
+                    </a:p>
+                  </a:txBody>
+                  <a:tcPr/>
+                </a:tc>
+                <a:tc>
+                  <a:txBody>
+                    <a:bodyPr/>
+                    <a:lstStyle/>
+                    <a:p>
+                      <a:r>
+                        <a:rPr kumimoji="1" lang="ja-JP" altLang="en-US" dirty="0"/>
+                        <a:t>弓矢による遠隔攻撃　硬直時間：短</a:t>
+                      </a:r>
+                    </a:p>
+                  </a:txBody>
+                  <a:tcPr/>
+                </a:tc>
+                <a:extLst>
+                  <a:ext uri="{0D108BD9-81ED-4DB2-BD59-A6C34878D82A}">
+                    <a16:rowId xmlns:a16="http://schemas.microsoft.com/office/drawing/2014/main" val="391020856"/>
+                  </a:ext>
+                </a:extLst>
+              </a:tr>
+              <a:tr h="370840">
+                <a:tc>
+                  <a:txBody>
+                    <a:bodyPr/>
+                    <a:lstStyle/>
+                    <a:p>
+                      <a:r>
+                        <a:rPr kumimoji="1" lang="ja-JP" altLang="en-US" dirty="0"/>
+                        <a:t>スキル</a:t>
+                      </a:r>
+                    </a:p>
+                  </a:txBody>
+                  <a:tcPr/>
+                </a:tc>
+                <a:tc>
+                  <a:txBody>
+                    <a:bodyPr/>
+                    <a:lstStyle/>
+                    <a:p>
+                      <a:r>
+                        <a:rPr kumimoji="1" lang="ja-JP" altLang="en-US" dirty="0"/>
+                        <a:t>数秒間高速で移動できる</a:t>
+                      </a:r>
+                    </a:p>
+                  </a:txBody>
+                  <a:tcPr/>
+                </a:tc>
+                <a:extLst>
+                  <a:ext uri="{0D108BD9-81ED-4DB2-BD59-A6C34878D82A}">
+                    <a16:rowId xmlns:a16="http://schemas.microsoft.com/office/drawing/2014/main" val="969716069"/>
+                  </a:ext>
+                </a:extLst>
+              </a:tr>
+              <a:tr h="370840">
+                <a:tc>
+                  <a:txBody>
+                    <a:bodyPr/>
+                    <a:lstStyle/>
+                    <a:p>
+                      <a:r>
+                        <a:rPr kumimoji="1" lang="ja-JP" altLang="en-US" dirty="0"/>
+                        <a:t>必殺技</a:t>
+                      </a:r>
+                    </a:p>
+                  </a:txBody>
+                  <a:tcPr/>
+                </a:tc>
+                <a:tc>
+                  <a:txBody>
+                    <a:bodyPr/>
+                    <a:lstStyle/>
+                    <a:p>
+                      <a:r>
+                        <a:rPr kumimoji="1" lang="ja-JP" altLang="en-US" dirty="0"/>
+                        <a:t>毒の矢で攻撃、一定時間定数ダメージ</a:t>
+                      </a:r>
+                    </a:p>
+                  </a:txBody>
+                  <a:tcPr/>
+                </a:tc>
+                <a:extLst>
+                  <a:ext uri="{0D108BD9-81ED-4DB2-BD59-A6C34878D82A}">
+                    <a16:rowId xmlns:a16="http://schemas.microsoft.com/office/drawing/2014/main" val="3820238464"/>
+                  </a:ext>
+                </a:extLst>
+              </a:tr>
+              <a:tr h="370840">
+                <a:tc>
+                  <a:txBody>
+                    <a:bodyPr/>
+                    <a:lstStyle/>
+                    <a:p>
+                      <a:r>
+                        <a:rPr kumimoji="1" lang="ja-JP" altLang="en-US" dirty="0"/>
+                        <a:t>解放されるタイミング</a:t>
+                      </a:r>
+                    </a:p>
+                  </a:txBody>
+                  <a:tcPr/>
+                </a:tc>
+                <a:tc>
+                  <a:txBody>
+                    <a:bodyPr/>
+                    <a:lstStyle/>
+                    <a:p>
+                      <a:r>
+                        <a:rPr kumimoji="1" lang="ja-JP" altLang="en-US" dirty="0"/>
+                        <a:t>中盤</a:t>
+                      </a:r>
+                    </a:p>
+                  </a:txBody>
+                  <a:tcPr/>
+                </a:tc>
+                <a:extLst>
+                  <a:ext uri="{0D108BD9-81ED-4DB2-BD59-A6C34878D82A}">
+                    <a16:rowId xmlns:a16="http://schemas.microsoft.com/office/drawing/2014/main" val="4086754404"/>
+                  </a:ext>
+                </a:extLst>
+              </a:tr>
+              <a:tr h="370840">
+                <a:tc>
+                  <a:txBody>
+                    <a:bodyPr/>
+                    <a:lstStyle/>
+                    <a:p>
+                      <a:r>
+                        <a:rPr kumimoji="1" lang="ja-JP" altLang="en-US" dirty="0"/>
+                        <a:t>備考</a:t>
+                      </a:r>
+                    </a:p>
+                  </a:txBody>
+                  <a:tcPr/>
+                </a:tc>
+                <a:tc>
+                  <a:txBody>
+                    <a:bodyPr/>
+                    <a:lstStyle/>
+                    <a:p>
+                      <a:endParaRPr kumimoji="1" lang="ja-JP" altLang="en-US" dirty="0"/>
+                    </a:p>
+                  </a:txBody>
+                  <a:tcPr/>
+                </a:tc>
+                <a:extLst>
+                  <a:ext uri="{0D108BD9-81ED-4DB2-BD59-A6C34878D82A}">
+                    <a16:rowId xmlns:a16="http://schemas.microsoft.com/office/drawing/2014/main" val="1182665698"/>
+                  </a:ext>
+                </a:extLst>
+              </a:tr>
+            </a:tbl>
+          </a:graphicData>
+        </a:graphic>
+      </p:graphicFrame>
+      <p:sp>
+        <p:nvSpPr>
+          <p:cNvPr id="5" name="テキスト ボックス 4">
+            <a:extLst>
+              <a:ext uri="{FF2B5EF4-FFF2-40B4-BE49-F238E27FC236}">
+                <a16:creationId xmlns:a16="http://schemas.microsoft.com/office/drawing/2014/main" id="{8BD76852-170D-4ABC-A233-BF44249999A5}"/>
+              </a:ext>
+            </a:extLst>
+          </p:cNvPr>
+          <p:cNvSpPr txBox="1"/>
+          <p:nvPr/>
+        </p:nvSpPr>
+        <p:spPr>
+          <a:xfrm>
+            <a:off x="4821382" y="1829997"/>
+            <a:ext cx="1800493" cy="369332"/>
+          </a:xfrm>
+          <a:prstGeom prst="rect">
+            <a:avLst/>
+          </a:prstGeom>
+          <a:noFill/>
+        </p:spPr>
+        <p:txBody>
+          <a:bodyPr wrap="none" rtlCol="0">
+            <a:spAutoFit/>
+          </a:bodyPr>
+          <a:lstStyle/>
+          <a:p>
+            <a:r>
+              <a:rPr kumimoji="1" lang="ja-JP" altLang="en-US" dirty="0"/>
+              <a:t>イメージ：妖精</a:t>
+            </a:r>
+          </a:p>
+        </p:txBody>
+      </p:sp>
+    </p:spTree>
+    <p:extLst>
+      <p:ext uri="{BB962C8B-B14F-4D97-AF65-F5344CB8AC3E}">
+        <p14:creationId xmlns:p14="http://schemas.microsoft.com/office/powerpoint/2010/main" val="647613495"/>
+      </p:ext>
+    </p:extLst>
+  </p:cSld>
+  <p:clrMapOvr>
+    <a:masterClrMapping/>
+  </p:clrMapOvr>
+</p:sld>
+</file>
+
+<file path=ppt/slides/slide7.xml><?xml version="1.0" encoding="utf-8"?>
+<p:sld xmlns:a="http://schemas.openxmlformats.org/drawingml/2006/main" xmlns:r="http://schemas.openxmlformats.org/officeDocument/2006/relationships" xmlns:p="http://schemas.openxmlformats.org/presentationml/2006/main">
+  <p:cSld>
+    <p:spTree>
+      <p:nvGrpSpPr>
+        <p:cNvPr id="1" name=""/>
+        <p:cNvGrpSpPr/>
+        <p:nvPr/>
+      </p:nvGrpSpPr>
+      <p:grpSpPr>
+        <a:xfrm>
+          <a:off x="0" y="0"/>
+          <a:ext cx="0" cy="0"/>
+          <a:chOff x="0" y="0"/>
+          <a:chExt cx="0" cy="0"/>
+        </a:xfrm>
+      </p:grpSpPr>
+      <p:sp>
+        <p:nvSpPr>
+          <p:cNvPr id="4" name="テキスト ボックス 3">
+            <a:extLst>
+              <a:ext uri="{FF2B5EF4-FFF2-40B4-BE49-F238E27FC236}">
+                <a16:creationId xmlns:a16="http://schemas.microsoft.com/office/drawing/2014/main" id="{CDB930A9-01B5-42D9-BBEE-3F2501F91D8D}"/>
+              </a:ext>
+            </a:extLst>
+          </p:cNvPr>
+          <p:cNvSpPr txBox="1"/>
+          <p:nvPr/>
+        </p:nvSpPr>
+        <p:spPr>
+          <a:xfrm>
+            <a:off x="1353787" y="1460665"/>
+            <a:ext cx="1107996" cy="369332"/>
+          </a:xfrm>
+          <a:prstGeom prst="rect">
+            <a:avLst/>
+          </a:prstGeom>
+          <a:noFill/>
+        </p:spPr>
+        <p:txBody>
+          <a:bodyPr wrap="none" rtlCol="0">
+            <a:spAutoFit/>
+          </a:bodyPr>
+          <a:lstStyle/>
+          <a:p>
+            <a:r>
+              <a:rPr kumimoji="1" lang="ja-JP" altLang="en-US" u="sng" dirty="0"/>
+              <a:t>妨害特化</a:t>
+            </a:r>
+          </a:p>
+        </p:txBody>
+      </p:sp>
+      <p:graphicFrame>
+        <p:nvGraphicFramePr>
+          <p:cNvPr id="6" name="表 6">
+            <a:extLst>
+              <a:ext uri="{FF2B5EF4-FFF2-40B4-BE49-F238E27FC236}">
+                <a16:creationId xmlns:a16="http://schemas.microsoft.com/office/drawing/2014/main" id="{ADFAA198-4C82-47B3-998F-E717146F6CA7}"/>
+              </a:ext>
+            </a:extLst>
+          </p:cNvPr>
+          <p:cNvGraphicFramePr>
+            <a:graphicFrameLocks noGrp="1"/>
+          </p:cNvGraphicFramePr>
+          <p:nvPr>
+            <p:extLst>
+              <p:ext uri="{D42A27DB-BD31-4B8C-83A1-F6EECF244321}">
+                <p14:modId xmlns:p14="http://schemas.microsoft.com/office/powerpoint/2010/main" val="443265227"/>
+              </p:ext>
+            </p:extLst>
+          </p:nvPr>
+        </p:nvGraphicFramePr>
+        <p:xfrm>
+          <a:off x="1746993" y="2432124"/>
+          <a:ext cx="8128000" cy="3337560"/>
+        </p:xfrm>
+        <a:graphic>
+          <a:graphicData uri="http://schemas.openxmlformats.org/drawingml/2006/table">
+            <a:tbl>
+              <a:tblPr firstRow="1" bandRow="1">
+                <a:tableStyleId>{5C22544A-7EE6-4342-B048-85BDC9FD1C3A}</a:tableStyleId>
+              </a:tblPr>
+              <a:tblGrid>
+                <a:gridCol w="2575625">
+                  <a:extLst>
+                    <a:ext uri="{9D8B030D-6E8A-4147-A177-3AD203B41FA5}">
+                      <a16:colId xmlns:a16="http://schemas.microsoft.com/office/drawing/2014/main" val="2168610415"/>
+                    </a:ext>
+                  </a:extLst>
+                </a:gridCol>
+                <a:gridCol w="5552375">
+                  <a:extLst>
+                    <a:ext uri="{9D8B030D-6E8A-4147-A177-3AD203B41FA5}">
+                      <a16:colId xmlns:a16="http://schemas.microsoft.com/office/drawing/2014/main" val="3530299536"/>
+                    </a:ext>
+                  </a:extLst>
+                </a:gridCol>
+              </a:tblGrid>
+              <a:tr h="370840">
+                <a:tc>
+                  <a:txBody>
+                    <a:bodyPr/>
+                    <a:lstStyle/>
+                    <a:p>
+                      <a:endParaRPr kumimoji="1" lang="ja-JP" altLang="en-US" dirty="0"/>
+                    </a:p>
+                  </a:txBody>
+                  <a:tcPr/>
+                </a:tc>
+                <a:tc>
+                  <a:txBody>
+                    <a:bodyPr/>
+                    <a:lstStyle/>
+                    <a:p>
+                      <a:endParaRPr kumimoji="1" lang="ja-JP" altLang="en-US"/>
+                    </a:p>
+                  </a:txBody>
+                  <a:tcPr/>
+                </a:tc>
+                <a:extLst>
+                  <a:ext uri="{0D108BD9-81ED-4DB2-BD59-A6C34878D82A}">
+                    <a16:rowId xmlns:a16="http://schemas.microsoft.com/office/drawing/2014/main" val="287851579"/>
+                  </a:ext>
+                </a:extLst>
+              </a:tr>
+              <a:tr h="370840">
+                <a:tc>
+                  <a:txBody>
+                    <a:bodyPr/>
+                    <a:lstStyle/>
+                    <a:p>
+                      <a:r>
+                        <a:rPr kumimoji="1" lang="ja-JP" altLang="en-US" dirty="0"/>
+                        <a:t>体力</a:t>
+                      </a:r>
+                    </a:p>
+                  </a:txBody>
+                  <a:tcPr/>
+                </a:tc>
+                <a:tc>
+                  <a:txBody>
+                    <a:bodyPr/>
+                    <a:lstStyle/>
+                    <a:p>
+                      <a:r>
+                        <a:rPr kumimoji="1" lang="ja-JP" altLang="en-US" dirty="0"/>
+                        <a:t>低</a:t>
+                      </a:r>
+                    </a:p>
+                  </a:txBody>
+                  <a:tcPr/>
+                </a:tc>
+                <a:extLst>
+                  <a:ext uri="{0D108BD9-81ED-4DB2-BD59-A6C34878D82A}">
+                    <a16:rowId xmlns:a16="http://schemas.microsoft.com/office/drawing/2014/main" val="2179425768"/>
+                  </a:ext>
+                </a:extLst>
+              </a:tr>
+              <a:tr h="370840">
+                <a:tc>
+                  <a:txBody>
+                    <a:bodyPr/>
+                    <a:lstStyle/>
+                    <a:p>
+                      <a:r>
+                        <a:rPr kumimoji="1" lang="ja-JP" altLang="en-US" dirty="0"/>
+                        <a:t>攻撃力</a:t>
+                      </a:r>
+                    </a:p>
+                  </a:txBody>
+                  <a:tcPr/>
+                </a:tc>
+                <a:tc>
+                  <a:txBody>
+                    <a:bodyPr/>
+                    <a:lstStyle/>
+                    <a:p>
+                      <a:r>
+                        <a:rPr kumimoji="1" lang="ja-JP" altLang="en-US" dirty="0"/>
+                        <a:t>０</a:t>
+                      </a:r>
+                    </a:p>
+                  </a:txBody>
+                  <a:tcPr/>
+                </a:tc>
+                <a:extLst>
+                  <a:ext uri="{0D108BD9-81ED-4DB2-BD59-A6C34878D82A}">
+                    <a16:rowId xmlns:a16="http://schemas.microsoft.com/office/drawing/2014/main" val="2170705841"/>
+                  </a:ext>
+                </a:extLst>
+              </a:tr>
+              <a:tr h="370840">
+                <a:tc>
+                  <a:txBody>
+                    <a:bodyPr/>
+                    <a:lstStyle/>
+                    <a:p>
+                      <a:r>
+                        <a:rPr kumimoji="1" lang="ja-JP" altLang="en-US" dirty="0"/>
+                        <a:t>素早さ</a:t>
+                      </a:r>
+                    </a:p>
+                  </a:txBody>
+                  <a:tcPr/>
+                </a:tc>
+                <a:tc>
+                  <a:txBody>
+                    <a:bodyPr/>
+                    <a:lstStyle/>
+                    <a:p>
+                      <a:r>
+                        <a:rPr kumimoji="1" lang="ja-JP" altLang="en-US" dirty="0"/>
+                        <a:t>高</a:t>
+                      </a:r>
+                    </a:p>
+                  </a:txBody>
+                  <a:tcPr/>
+                </a:tc>
+                <a:extLst>
+                  <a:ext uri="{0D108BD9-81ED-4DB2-BD59-A6C34878D82A}">
+                    <a16:rowId xmlns:a16="http://schemas.microsoft.com/office/drawing/2014/main" val="1438526933"/>
+                  </a:ext>
+                </a:extLst>
+              </a:tr>
+              <a:tr h="370840">
+                <a:tc>
+                  <a:txBody>
+                    <a:bodyPr/>
+                    <a:lstStyle/>
+                    <a:p>
+                      <a:r>
+                        <a:rPr kumimoji="1" lang="ja-JP" altLang="en-US" dirty="0"/>
+                        <a:t>通常攻撃</a:t>
+                      </a:r>
+                    </a:p>
+                  </a:txBody>
+                  <a:tcPr/>
+                </a:tc>
+                <a:tc>
+                  <a:txBody>
+                    <a:bodyPr/>
+                    <a:lstStyle/>
+                    <a:p>
+                      <a:r>
+                        <a:rPr kumimoji="1" lang="ja-JP" altLang="en-US" dirty="0"/>
+                        <a:t>毒を噴射、当たると毒状態に　硬直時間：中</a:t>
+                      </a:r>
+                    </a:p>
+                  </a:txBody>
+                  <a:tcPr/>
+                </a:tc>
+                <a:extLst>
+                  <a:ext uri="{0D108BD9-81ED-4DB2-BD59-A6C34878D82A}">
+                    <a16:rowId xmlns:a16="http://schemas.microsoft.com/office/drawing/2014/main" val="391020856"/>
+                  </a:ext>
+                </a:extLst>
+              </a:tr>
+              <a:tr h="370840">
+                <a:tc>
+                  <a:txBody>
+                    <a:bodyPr/>
+                    <a:lstStyle/>
+                    <a:p>
+                      <a:r>
+                        <a:rPr kumimoji="1" lang="ja-JP" altLang="en-US" dirty="0"/>
+                        <a:t>スキル</a:t>
+                      </a:r>
+                    </a:p>
+                  </a:txBody>
+                  <a:tcPr/>
+                </a:tc>
+                <a:tc>
+                  <a:txBody>
+                    <a:bodyPr/>
+                    <a:lstStyle/>
+                    <a:p>
+                      <a:r>
+                        <a:rPr kumimoji="1" lang="ja-JP" altLang="en-US" dirty="0"/>
+                        <a:t>一定時間動けなくなるトラップを設置</a:t>
+                      </a:r>
+                    </a:p>
+                  </a:txBody>
+                  <a:tcPr/>
+                </a:tc>
+                <a:extLst>
+                  <a:ext uri="{0D108BD9-81ED-4DB2-BD59-A6C34878D82A}">
+                    <a16:rowId xmlns:a16="http://schemas.microsoft.com/office/drawing/2014/main" val="969716069"/>
+                  </a:ext>
+                </a:extLst>
+              </a:tr>
+              <a:tr h="370840">
+                <a:tc>
+                  <a:txBody>
+                    <a:bodyPr/>
+                    <a:lstStyle/>
+                    <a:p>
+                      <a:r>
+                        <a:rPr kumimoji="1" lang="ja-JP" altLang="en-US" dirty="0"/>
+                        <a:t>必殺技</a:t>
+                      </a:r>
+                    </a:p>
+                  </a:txBody>
+                  <a:tcPr/>
+                </a:tc>
+                <a:tc>
+                  <a:txBody>
+                    <a:bodyPr/>
+                    <a:lstStyle/>
+                    <a:p>
+                      <a:r>
+                        <a:rPr kumimoji="1" lang="ja-JP" altLang="en-US" dirty="0"/>
+                        <a:t>当たった敵のスキル、必殺技ゲージを０にする</a:t>
+                      </a:r>
+                    </a:p>
+                  </a:txBody>
+                  <a:tcPr/>
+                </a:tc>
+                <a:extLst>
+                  <a:ext uri="{0D108BD9-81ED-4DB2-BD59-A6C34878D82A}">
+                    <a16:rowId xmlns:a16="http://schemas.microsoft.com/office/drawing/2014/main" val="3820238464"/>
+                  </a:ext>
+                </a:extLst>
+              </a:tr>
+              <a:tr h="370840">
+                <a:tc>
+                  <a:txBody>
+                    <a:bodyPr/>
+                    <a:lstStyle/>
+                    <a:p>
+                      <a:r>
+                        <a:rPr kumimoji="1" lang="ja-JP" altLang="en-US" dirty="0"/>
+                        <a:t>解放されるタイミング</a:t>
+                      </a:r>
+                    </a:p>
+                  </a:txBody>
+                  <a:tcPr/>
+                </a:tc>
+                <a:tc>
+                  <a:txBody>
+                    <a:bodyPr/>
+                    <a:lstStyle/>
+                    <a:p>
+                      <a:r>
+                        <a:rPr kumimoji="1" lang="ja-JP" altLang="en-US" dirty="0"/>
+                        <a:t>終盤</a:t>
+                      </a:r>
+                    </a:p>
+                  </a:txBody>
+                  <a:tcPr/>
+                </a:tc>
+                <a:extLst>
+                  <a:ext uri="{0D108BD9-81ED-4DB2-BD59-A6C34878D82A}">
+                    <a16:rowId xmlns:a16="http://schemas.microsoft.com/office/drawing/2014/main" val="4086754404"/>
+                  </a:ext>
+                </a:extLst>
+              </a:tr>
+              <a:tr h="370840">
+                <a:tc>
+                  <a:txBody>
+                    <a:bodyPr/>
+                    <a:lstStyle/>
+                    <a:p>
+                      <a:r>
+                        <a:rPr kumimoji="1" lang="ja-JP" altLang="en-US" dirty="0"/>
+                        <a:t>備考</a:t>
+                      </a:r>
+                    </a:p>
+                  </a:txBody>
+                  <a:tcPr/>
+                </a:tc>
+                <a:tc>
+                  <a:txBody>
+                    <a:bodyPr/>
+                    <a:lstStyle/>
+                    <a:p>
+                      <a:endParaRPr kumimoji="1" lang="ja-JP" altLang="en-US" dirty="0"/>
+                    </a:p>
+                  </a:txBody>
+                  <a:tcPr/>
+                </a:tc>
+                <a:extLst>
+                  <a:ext uri="{0D108BD9-81ED-4DB2-BD59-A6C34878D82A}">
+                    <a16:rowId xmlns:a16="http://schemas.microsoft.com/office/drawing/2014/main" val="1182665698"/>
+                  </a:ext>
+                </a:extLst>
+              </a:tr>
+            </a:tbl>
+          </a:graphicData>
+        </a:graphic>
+      </p:graphicFrame>
+      <p:sp>
+        <p:nvSpPr>
+          <p:cNvPr id="5" name="テキスト ボックス 4">
+            <a:extLst>
+              <a:ext uri="{FF2B5EF4-FFF2-40B4-BE49-F238E27FC236}">
+                <a16:creationId xmlns:a16="http://schemas.microsoft.com/office/drawing/2014/main" id="{46A3F2D3-3564-4A75-9CF5-FEA21278DC76}"/>
+              </a:ext>
+            </a:extLst>
+          </p:cNvPr>
+          <p:cNvSpPr txBox="1"/>
+          <p:nvPr/>
+        </p:nvSpPr>
+        <p:spPr>
+          <a:xfrm>
+            <a:off x="4821382" y="1829997"/>
+            <a:ext cx="1800493" cy="369332"/>
+          </a:xfrm>
+          <a:prstGeom prst="rect">
+            <a:avLst/>
+          </a:prstGeom>
+          <a:noFill/>
+        </p:spPr>
+        <p:txBody>
+          <a:bodyPr wrap="none" rtlCol="0">
+            <a:spAutoFit/>
+          </a:bodyPr>
+          <a:lstStyle/>
+          <a:p>
+            <a:r>
+              <a:rPr kumimoji="1" lang="ja-JP" altLang="en-US" dirty="0"/>
+              <a:t>イメージ：毒蛇</a:t>
+            </a:r>
+          </a:p>
+        </p:txBody>
+      </p:sp>
+    </p:spTree>
+    <p:extLst>
+      <p:ext uri="{BB962C8B-B14F-4D97-AF65-F5344CB8AC3E}">
+        <p14:creationId xmlns:p14="http://schemas.microsoft.com/office/powerpoint/2010/main" val="3456137557"/>
+      </p:ext>
+    </p:extLst>
+  </p:cSld>
+  <p:clrMapOvr>
+    <a:masterClrMapping/>
+  </p:clrMapOvr>
+</p:sld>
+</file>
+
+<file path=ppt/slides/slide8.xml><?xml version="1.0" encoding="utf-8"?>
+<p:sld xmlns:a="http://schemas.openxmlformats.org/drawingml/2006/main" xmlns:r="http://schemas.openxmlformats.org/officeDocument/2006/relationships" xmlns:p="http://schemas.openxmlformats.org/presentationml/2006/main">
+  <p:cSld>
+    <p:spTree>
+      <p:nvGrpSpPr>
+        <p:cNvPr id="1" name=""/>
+        <p:cNvGrpSpPr/>
+        <p:nvPr/>
+      </p:nvGrpSpPr>
+      <p:grpSpPr>
+        <a:xfrm>
+          <a:off x="0" y="0"/>
+          <a:ext cx="0" cy="0"/>
+          <a:chOff x="0" y="0"/>
+          <a:chExt cx="0" cy="0"/>
+        </a:xfrm>
+      </p:grpSpPr>
+      <p:sp>
+        <p:nvSpPr>
+          <p:cNvPr id="4" name="テキスト ボックス 3">
+            <a:extLst>
+              <a:ext uri="{FF2B5EF4-FFF2-40B4-BE49-F238E27FC236}">
+                <a16:creationId xmlns:a16="http://schemas.microsoft.com/office/drawing/2014/main" id="{CDB930A9-01B5-42D9-BBEE-3F2501F91D8D}"/>
+              </a:ext>
+            </a:extLst>
+          </p:cNvPr>
+          <p:cNvSpPr txBox="1"/>
+          <p:nvPr/>
+        </p:nvSpPr>
+        <p:spPr>
+          <a:xfrm>
+            <a:off x="1353787" y="1460665"/>
+            <a:ext cx="1338828" cy="369332"/>
+          </a:xfrm>
+          <a:prstGeom prst="rect">
+            <a:avLst/>
+          </a:prstGeom>
+          <a:noFill/>
+        </p:spPr>
+        <p:txBody>
+          <a:bodyPr wrap="none" rtlCol="0">
+            <a:spAutoFit/>
+          </a:bodyPr>
+          <a:lstStyle/>
+          <a:p>
+            <a:r>
+              <a:rPr kumimoji="1" lang="ja-JP" altLang="en-US" u="sng" dirty="0"/>
+              <a:t>（追加用）</a:t>
+            </a:r>
+          </a:p>
+        </p:txBody>
+      </p:sp>
+      <p:graphicFrame>
+        <p:nvGraphicFramePr>
+          <p:cNvPr id="6" name="表 6">
+            <a:extLst>
+              <a:ext uri="{FF2B5EF4-FFF2-40B4-BE49-F238E27FC236}">
+                <a16:creationId xmlns:a16="http://schemas.microsoft.com/office/drawing/2014/main" id="{ADFAA198-4C82-47B3-998F-E717146F6CA7}"/>
+              </a:ext>
+            </a:extLst>
+          </p:cNvPr>
+          <p:cNvGraphicFramePr>
+            <a:graphicFrameLocks noGrp="1"/>
+          </p:cNvGraphicFramePr>
+          <p:nvPr/>
+        </p:nvGraphicFramePr>
+        <p:xfrm>
+          <a:off x="1746993" y="2432124"/>
+          <a:ext cx="8128000" cy="3337560"/>
+        </p:xfrm>
+        <a:graphic>
+          <a:graphicData uri="http://schemas.openxmlformats.org/drawingml/2006/table">
+            <a:tbl>
+              <a:tblPr firstRow="1" bandRow="1">
+                <a:tableStyleId>{5C22544A-7EE6-4342-B048-85BDC9FD1C3A}</a:tableStyleId>
+              </a:tblPr>
+              <a:tblGrid>
+                <a:gridCol w="2575625">
+                  <a:extLst>
+                    <a:ext uri="{9D8B030D-6E8A-4147-A177-3AD203B41FA5}">
+                      <a16:colId xmlns:a16="http://schemas.microsoft.com/office/drawing/2014/main" val="2168610415"/>
+                    </a:ext>
+                  </a:extLst>
+                </a:gridCol>
+                <a:gridCol w="5552375">
+                  <a:extLst>
+                    <a:ext uri="{9D8B030D-6E8A-4147-A177-3AD203B41FA5}">
+                      <a16:colId xmlns:a16="http://schemas.microsoft.com/office/drawing/2014/main" val="3530299536"/>
+                    </a:ext>
+                  </a:extLst>
+                </a:gridCol>
+              </a:tblGrid>
+              <a:tr h="370840">
+                <a:tc>
+                  <a:txBody>
+                    <a:bodyPr/>
+                    <a:lstStyle/>
+                    <a:p>
+                      <a:endParaRPr kumimoji="1" lang="ja-JP" altLang="en-US" dirty="0"/>
+                    </a:p>
+                  </a:txBody>
+                  <a:tcPr/>
+                </a:tc>
+                <a:tc>
+                  <a:txBody>
+                    <a:bodyPr/>
+                    <a:lstStyle/>
+                    <a:p>
+                      <a:endParaRPr kumimoji="1" lang="ja-JP" altLang="en-US"/>
+                    </a:p>
+                  </a:txBody>
+                  <a:tcPr/>
+                </a:tc>
+                <a:extLst>
+                  <a:ext uri="{0D108BD9-81ED-4DB2-BD59-A6C34878D82A}">
+                    <a16:rowId xmlns:a16="http://schemas.microsoft.com/office/drawing/2014/main" val="287851579"/>
+                  </a:ext>
+                </a:extLst>
+              </a:tr>
+              <a:tr h="370840">
+                <a:tc>
+                  <a:txBody>
+                    <a:bodyPr/>
+                    <a:lstStyle/>
+                    <a:p>
+                      <a:r>
+                        <a:rPr kumimoji="1" lang="ja-JP" altLang="en-US" dirty="0"/>
+                        <a:t>体力</a:t>
+                      </a:r>
+                    </a:p>
+                  </a:txBody>
+                  <a:tcPr/>
+                </a:tc>
+                <a:tc>
+                  <a:txBody>
+                    <a:bodyPr/>
+                    <a:lstStyle/>
+                    <a:p>
+                      <a:endParaRPr kumimoji="1" lang="ja-JP" altLang="en-US"/>
+                    </a:p>
+                  </a:txBody>
+                  <a:tcPr/>
+                </a:tc>
+                <a:extLst>
+                  <a:ext uri="{0D108BD9-81ED-4DB2-BD59-A6C34878D82A}">
+                    <a16:rowId xmlns:a16="http://schemas.microsoft.com/office/drawing/2014/main" val="2179425768"/>
+                  </a:ext>
+                </a:extLst>
+              </a:tr>
+              <a:tr h="370840">
+                <a:tc>
+                  <a:txBody>
+                    <a:bodyPr/>
+                    <a:lstStyle/>
+                    <a:p>
+                      <a:r>
+                        <a:rPr kumimoji="1" lang="ja-JP" altLang="en-US" dirty="0"/>
+                        <a:t>攻撃力</a:t>
+                      </a:r>
+                    </a:p>
+                  </a:txBody>
+                  <a:tcPr/>
+                </a:tc>
+                <a:tc>
+                  <a:txBody>
+                    <a:bodyPr/>
+                    <a:lstStyle/>
+                    <a:p>
+                      <a:endParaRPr kumimoji="1" lang="ja-JP" altLang="en-US"/>
+                    </a:p>
+                  </a:txBody>
+                  <a:tcPr/>
+                </a:tc>
+                <a:extLst>
+                  <a:ext uri="{0D108BD9-81ED-4DB2-BD59-A6C34878D82A}">
+                    <a16:rowId xmlns:a16="http://schemas.microsoft.com/office/drawing/2014/main" val="2170705841"/>
+                  </a:ext>
+                </a:extLst>
+              </a:tr>
+              <a:tr h="370840">
+                <a:tc>
+                  <a:txBody>
+                    <a:bodyPr/>
+                    <a:lstStyle/>
+                    <a:p>
+                      <a:r>
+                        <a:rPr kumimoji="1" lang="ja-JP" altLang="en-US" dirty="0"/>
+                        <a:t>素早さ</a:t>
+                      </a:r>
+                    </a:p>
+                  </a:txBody>
+                  <a:tcPr/>
+                </a:tc>
+                <a:tc>
+                  <a:txBody>
+                    <a:bodyPr/>
+                    <a:lstStyle/>
+                    <a:p>
+                      <a:endParaRPr kumimoji="1" lang="ja-JP" altLang="en-US"/>
+                    </a:p>
+                  </a:txBody>
+                  <a:tcPr/>
+                </a:tc>
+                <a:extLst>
+                  <a:ext uri="{0D108BD9-81ED-4DB2-BD59-A6C34878D82A}">
+                    <a16:rowId xmlns:a16="http://schemas.microsoft.com/office/drawing/2014/main" val="1438526933"/>
+                  </a:ext>
+                </a:extLst>
+              </a:tr>
+              <a:tr h="370840">
+                <a:tc>
+                  <a:txBody>
+                    <a:bodyPr/>
+                    <a:lstStyle/>
+                    <a:p>
+                      <a:r>
+                        <a:rPr kumimoji="1" lang="ja-JP" altLang="en-US" dirty="0"/>
+                        <a:t>通常攻撃</a:t>
+                      </a:r>
+                    </a:p>
+                  </a:txBody>
+                  <a:tcPr/>
+                </a:tc>
+                <a:tc>
+                  <a:txBody>
+                    <a:bodyPr/>
+                    <a:lstStyle/>
+                    <a:p>
+                      <a:endParaRPr kumimoji="1" lang="ja-JP" altLang="en-US"/>
+                    </a:p>
+                  </a:txBody>
+                  <a:tcPr/>
+                </a:tc>
+                <a:extLst>
+                  <a:ext uri="{0D108BD9-81ED-4DB2-BD59-A6C34878D82A}">
+                    <a16:rowId xmlns:a16="http://schemas.microsoft.com/office/drawing/2014/main" val="391020856"/>
+                  </a:ext>
+                </a:extLst>
+              </a:tr>
+              <a:tr h="370840">
+                <a:tc>
+                  <a:txBody>
+                    <a:bodyPr/>
+                    <a:lstStyle/>
+                    <a:p>
+                      <a:r>
+                        <a:rPr kumimoji="1" lang="ja-JP" altLang="en-US" dirty="0"/>
+                        <a:t>スキル</a:t>
+                      </a:r>
+                    </a:p>
+                  </a:txBody>
+                  <a:tcPr/>
+                </a:tc>
+                <a:tc>
+                  <a:txBody>
+                    <a:bodyPr/>
+                    <a:lstStyle/>
+                    <a:p>
+                      <a:endParaRPr kumimoji="1" lang="ja-JP" altLang="en-US"/>
+                    </a:p>
+                  </a:txBody>
+                  <a:tcPr/>
+                </a:tc>
+                <a:extLst>
+                  <a:ext uri="{0D108BD9-81ED-4DB2-BD59-A6C34878D82A}">
+                    <a16:rowId xmlns:a16="http://schemas.microsoft.com/office/drawing/2014/main" val="969716069"/>
+                  </a:ext>
+                </a:extLst>
+              </a:tr>
+              <a:tr h="370840">
+                <a:tc>
+                  <a:txBody>
+                    <a:bodyPr/>
+                    <a:lstStyle/>
+                    <a:p>
+                      <a:r>
+                        <a:rPr kumimoji="1" lang="ja-JP" altLang="en-US" dirty="0"/>
+                        <a:t>必殺技</a:t>
+                      </a:r>
+                    </a:p>
+                  </a:txBody>
+                  <a:tcPr/>
+                </a:tc>
+                <a:tc>
+                  <a:txBody>
+                    <a:bodyPr/>
+                    <a:lstStyle/>
+                    <a:p>
+                      <a:endParaRPr kumimoji="1" lang="ja-JP" altLang="en-US" dirty="0"/>
+                    </a:p>
+                  </a:txBody>
+                  <a:tcPr/>
+                </a:tc>
+                <a:extLst>
+                  <a:ext uri="{0D108BD9-81ED-4DB2-BD59-A6C34878D82A}">
+                    <a16:rowId xmlns:a16="http://schemas.microsoft.com/office/drawing/2014/main" val="3820238464"/>
+                  </a:ext>
+                </a:extLst>
+              </a:tr>
+              <a:tr h="370840">
+                <a:tc>
+                  <a:txBody>
+                    <a:bodyPr/>
+                    <a:lstStyle/>
+                    <a:p>
+                      <a:r>
+                        <a:rPr kumimoji="1" lang="ja-JP" altLang="en-US" dirty="0"/>
+                        <a:t>解放されるタイミング</a:t>
+                      </a:r>
+                    </a:p>
+                  </a:txBody>
+                  <a:tcPr/>
+                </a:tc>
+                <a:tc>
+                  <a:txBody>
+                    <a:bodyPr/>
+                    <a:lstStyle/>
+                    <a:p>
+                      <a:endParaRPr kumimoji="1" lang="ja-JP" altLang="en-US" dirty="0"/>
+                    </a:p>
+                  </a:txBody>
+                  <a:tcPr/>
+                </a:tc>
+                <a:extLst>
+                  <a:ext uri="{0D108BD9-81ED-4DB2-BD59-A6C34878D82A}">
+                    <a16:rowId xmlns:a16="http://schemas.microsoft.com/office/drawing/2014/main" val="4086754404"/>
+                  </a:ext>
+                </a:extLst>
+              </a:tr>
+              <a:tr h="370840">
+                <a:tc>
+                  <a:txBody>
+                    <a:bodyPr/>
+                    <a:lstStyle/>
+                    <a:p>
+                      <a:r>
+                        <a:rPr kumimoji="1" lang="ja-JP" altLang="en-US" dirty="0"/>
+                        <a:t>備考</a:t>
+                      </a:r>
+                    </a:p>
+                  </a:txBody>
+                  <a:tcPr/>
+                </a:tc>
+                <a:tc>
+                  <a:txBody>
+                    <a:bodyPr/>
+                    <a:lstStyle/>
+                    <a:p>
+                      <a:endParaRPr kumimoji="1" lang="ja-JP" altLang="en-US" dirty="0"/>
+                    </a:p>
+                  </a:txBody>
+                  <a:tcPr/>
+                </a:tc>
+                <a:extLst>
+                  <a:ext uri="{0D108BD9-81ED-4DB2-BD59-A6C34878D82A}">
+                    <a16:rowId xmlns:a16="http://schemas.microsoft.com/office/drawing/2014/main" val="1182665698"/>
+                  </a:ext>
+                </a:extLst>
+              </a:tr>
+            </a:tbl>
+          </a:graphicData>
+        </a:graphic>
+      </p:graphicFrame>
+    </p:spTree>
+    <p:extLst>
+      <p:ext uri="{BB962C8B-B14F-4D97-AF65-F5344CB8AC3E}">
+        <p14:creationId xmlns:p14="http://schemas.microsoft.com/office/powerpoint/2010/main" val="3136141015"/>
+      </p:ext>
+    </p:extLst>
+  </p:cSld>
+  <p:clrMapOvr>
+    <a:masterClrMapping/>
+  </p:clrMapOvr>
+</p:sld>
+</file>
+
+<file path=ppt/slides/slide9.xml><?xml version="1.0" encoding="utf-8"?>
+<p:sld xmlns:a="http://schemas.openxmlformats.org/drawingml/2006/main" xmlns:r="http://schemas.openxmlformats.org/officeDocument/2006/relationships" xmlns:p="http://schemas.openxmlformats.org/presentationml/2006/main">
+  <p:cSld>
+    <p:spTree>
+      <p:nvGrpSpPr>
+        <p:cNvPr id="1" name=""/>
+        <p:cNvGrpSpPr/>
+        <p:nvPr/>
+      </p:nvGrpSpPr>
+      <p:grpSpPr>
+        <a:xfrm>
+          <a:off x="0" y="0"/>
+          <a:ext cx="0" cy="0"/>
+          <a:chOff x="0" y="0"/>
+          <a:chExt cx="0" cy="0"/>
+        </a:xfrm>
+      </p:grpSpPr>
+      <p:sp>
+        <p:nvSpPr>
+          <p:cNvPr id="4" name="テキスト ボックス 3">
+            <a:extLst>
+              <a:ext uri="{FF2B5EF4-FFF2-40B4-BE49-F238E27FC236}">
+                <a16:creationId xmlns:a16="http://schemas.microsoft.com/office/drawing/2014/main" id="{CDB930A9-01B5-42D9-BBEE-3F2501F91D8D}"/>
+              </a:ext>
+            </a:extLst>
+          </p:cNvPr>
+          <p:cNvSpPr txBox="1"/>
+          <p:nvPr/>
+        </p:nvSpPr>
+        <p:spPr>
+          <a:xfrm>
+            <a:off x="1353787" y="1460665"/>
+            <a:ext cx="1338828" cy="369332"/>
+          </a:xfrm>
+          <a:prstGeom prst="rect">
+            <a:avLst/>
+          </a:prstGeom>
+          <a:noFill/>
+        </p:spPr>
+        <p:txBody>
+          <a:bodyPr wrap="none" rtlCol="0">
+            <a:spAutoFit/>
+          </a:bodyPr>
+          <a:lstStyle/>
+          <a:p>
+            <a:r>
+              <a:rPr kumimoji="1" lang="ja-JP" altLang="en-US" u="sng" dirty="0"/>
+              <a:t>バランス型</a:t>
+            </a:r>
+          </a:p>
+        </p:txBody>
+      </p:sp>
+      <p:graphicFrame>
+        <p:nvGraphicFramePr>
+          <p:cNvPr id="6" name="表 6">
+            <a:extLst>
+              <a:ext uri="{FF2B5EF4-FFF2-40B4-BE49-F238E27FC236}">
+                <a16:creationId xmlns:a16="http://schemas.microsoft.com/office/drawing/2014/main" id="{ADFAA198-4C82-47B3-998F-E717146F6CA7}"/>
+              </a:ext>
+            </a:extLst>
+          </p:cNvPr>
+          <p:cNvGraphicFramePr>
+            <a:graphicFrameLocks noGrp="1"/>
+          </p:cNvGraphicFramePr>
+          <p:nvPr/>
+        </p:nvGraphicFramePr>
+        <p:xfrm>
+          <a:off x="1746993" y="2432124"/>
+          <a:ext cx="8128000" cy="3337560"/>
+        </p:xfrm>
+        <a:graphic>
+          <a:graphicData uri="http://schemas.openxmlformats.org/drawingml/2006/table">
+            <a:tbl>
+              <a:tblPr firstRow="1" bandRow="1">
+                <a:tableStyleId>{5C22544A-7EE6-4342-B048-85BDC9FD1C3A}</a:tableStyleId>
+              </a:tblPr>
+              <a:tblGrid>
+                <a:gridCol w="2575625">
+                  <a:extLst>
+                    <a:ext uri="{9D8B030D-6E8A-4147-A177-3AD203B41FA5}">
+                      <a16:colId xmlns:a16="http://schemas.microsoft.com/office/drawing/2014/main" val="2168610415"/>
+                    </a:ext>
+                  </a:extLst>
+                </a:gridCol>
+                <a:gridCol w="5552375">
+                  <a:extLst>
+                    <a:ext uri="{9D8B030D-6E8A-4147-A177-3AD203B41FA5}">
+                      <a16:colId xmlns:a16="http://schemas.microsoft.com/office/drawing/2014/main" val="3530299536"/>
+                    </a:ext>
+                  </a:extLst>
+                </a:gridCol>
+              </a:tblGrid>
+              <a:tr h="370840">
+                <a:tc>
+                  <a:txBody>
+                    <a:bodyPr/>
+                    <a:lstStyle/>
+                    <a:p>
+                      <a:endParaRPr kumimoji="1" lang="ja-JP" altLang="en-US" dirty="0"/>
+                    </a:p>
+                  </a:txBody>
+                  <a:tcPr/>
+                </a:tc>
+                <a:tc>
+                  <a:txBody>
+                    <a:bodyPr/>
+                    <a:lstStyle/>
+                    <a:p>
+                      <a:endParaRPr kumimoji="1" lang="ja-JP" altLang="en-US"/>
+                    </a:p>
+                  </a:txBody>
+                  <a:tcPr/>
+                </a:tc>
+                <a:extLst>
+                  <a:ext uri="{0D108BD9-81ED-4DB2-BD59-A6C34878D82A}">
+                    <a16:rowId xmlns:a16="http://schemas.microsoft.com/office/drawing/2014/main" val="287851579"/>
+                  </a:ext>
+                </a:extLst>
+              </a:tr>
+              <a:tr h="370840">
+                <a:tc>
+                  <a:txBody>
+                    <a:bodyPr/>
+                    <a:lstStyle/>
+                    <a:p>
+                      <a:r>
+                        <a:rPr kumimoji="1" lang="ja-JP" altLang="en-US" dirty="0"/>
+                        <a:t>体力</a:t>
+                      </a:r>
+                    </a:p>
+                  </a:txBody>
+                  <a:tcPr/>
+                </a:tc>
+                <a:tc>
+                  <a:txBody>
+                    <a:bodyPr/>
+                    <a:lstStyle/>
+                    <a:p>
+                      <a:endParaRPr kumimoji="1" lang="ja-JP" altLang="en-US"/>
+                    </a:p>
+                  </a:txBody>
+                  <a:tcPr/>
+                </a:tc>
+                <a:extLst>
+                  <a:ext uri="{0D108BD9-81ED-4DB2-BD59-A6C34878D82A}">
+                    <a16:rowId xmlns:a16="http://schemas.microsoft.com/office/drawing/2014/main" val="2179425768"/>
+                  </a:ext>
+                </a:extLst>
+              </a:tr>
+              <a:tr h="370840">
+                <a:tc>
+                  <a:txBody>
+                    <a:bodyPr/>
+                    <a:lstStyle/>
+                    <a:p>
+                      <a:r>
+                        <a:rPr kumimoji="1" lang="ja-JP" altLang="en-US" dirty="0"/>
+                        <a:t>攻撃力</a:t>
+                      </a:r>
+                    </a:p>
+                  </a:txBody>
+                  <a:tcPr/>
+                </a:tc>
+                <a:tc>
+                  <a:txBody>
+                    <a:bodyPr/>
+                    <a:lstStyle/>
+                    <a:p>
+                      <a:endParaRPr kumimoji="1" lang="ja-JP" altLang="en-US"/>
+                    </a:p>
+                  </a:txBody>
+                  <a:tcPr/>
+                </a:tc>
+                <a:extLst>
+                  <a:ext uri="{0D108BD9-81ED-4DB2-BD59-A6C34878D82A}">
+                    <a16:rowId xmlns:a16="http://schemas.microsoft.com/office/drawing/2014/main" val="2170705841"/>
+                  </a:ext>
+                </a:extLst>
+              </a:tr>
+              <a:tr h="370840">
+                <a:tc>
+                  <a:txBody>
+                    <a:bodyPr/>
+                    <a:lstStyle/>
+                    <a:p>
+                      <a:r>
+                        <a:rPr kumimoji="1" lang="ja-JP" altLang="en-US" dirty="0"/>
+                        <a:t>素早さ</a:t>
+                      </a:r>
+                    </a:p>
+                  </a:txBody>
+                  <a:tcPr/>
+                </a:tc>
+                <a:tc>
+                  <a:txBody>
+                    <a:bodyPr/>
+                    <a:lstStyle/>
+                    <a:p>
+                      <a:endParaRPr kumimoji="1" lang="ja-JP" altLang="en-US"/>
+                    </a:p>
+                  </a:txBody>
+                  <a:tcPr/>
+                </a:tc>
+                <a:extLst>
+                  <a:ext uri="{0D108BD9-81ED-4DB2-BD59-A6C34878D82A}">
+                    <a16:rowId xmlns:a16="http://schemas.microsoft.com/office/drawing/2014/main" val="1438526933"/>
+                  </a:ext>
+                </a:extLst>
+              </a:tr>
+              <a:tr h="370840">
+                <a:tc>
+                  <a:txBody>
+                    <a:bodyPr/>
+                    <a:lstStyle/>
+                    <a:p>
+                      <a:r>
+                        <a:rPr kumimoji="1" lang="ja-JP" altLang="en-US" dirty="0"/>
+                        <a:t>通常攻撃</a:t>
+                      </a:r>
+                    </a:p>
+                  </a:txBody>
+                  <a:tcPr/>
+                </a:tc>
+                <a:tc>
+                  <a:txBody>
+                    <a:bodyPr/>
+                    <a:lstStyle/>
+                    <a:p>
+                      <a:endParaRPr kumimoji="1" lang="ja-JP" altLang="en-US"/>
+                    </a:p>
+                  </a:txBody>
+                  <a:tcPr/>
+                </a:tc>
+                <a:extLst>
+                  <a:ext uri="{0D108BD9-81ED-4DB2-BD59-A6C34878D82A}">
+                    <a16:rowId xmlns:a16="http://schemas.microsoft.com/office/drawing/2014/main" val="391020856"/>
+                  </a:ext>
+                </a:extLst>
+              </a:tr>
+              <a:tr h="370840">
+                <a:tc>
+                  <a:txBody>
+                    <a:bodyPr/>
+                    <a:lstStyle/>
+                    <a:p>
+                      <a:r>
+                        <a:rPr kumimoji="1" lang="ja-JP" altLang="en-US" dirty="0"/>
+                        <a:t>スキル</a:t>
+                      </a:r>
+                    </a:p>
+                  </a:txBody>
+                  <a:tcPr/>
+                </a:tc>
+                <a:tc>
+                  <a:txBody>
+                    <a:bodyPr/>
+                    <a:lstStyle/>
+                    <a:p>
+                      <a:endParaRPr kumimoji="1" lang="ja-JP" altLang="en-US"/>
+                    </a:p>
+                  </a:txBody>
+                  <a:tcPr/>
+                </a:tc>
+                <a:extLst>
+                  <a:ext uri="{0D108BD9-81ED-4DB2-BD59-A6C34878D82A}">
+                    <a16:rowId xmlns:a16="http://schemas.microsoft.com/office/drawing/2014/main" val="969716069"/>
+                  </a:ext>
+                </a:extLst>
+              </a:tr>
+              <a:tr h="370840">
+                <a:tc>
+                  <a:txBody>
+                    <a:bodyPr/>
+                    <a:lstStyle/>
+                    <a:p>
+                      <a:r>
+                        <a:rPr kumimoji="1" lang="ja-JP" altLang="en-US" dirty="0"/>
+                        <a:t>必殺技</a:t>
+                      </a:r>
+                    </a:p>
+                  </a:txBody>
+                  <a:tcPr/>
+                </a:tc>
+                <a:tc>
+                  <a:txBody>
+                    <a:bodyPr/>
+                    <a:lstStyle/>
+                    <a:p>
+                      <a:endParaRPr kumimoji="1" lang="ja-JP" altLang="en-US" dirty="0"/>
+                    </a:p>
+                  </a:txBody>
+                  <a:tcPr/>
+                </a:tc>
+                <a:extLst>
+                  <a:ext uri="{0D108BD9-81ED-4DB2-BD59-A6C34878D82A}">
+                    <a16:rowId xmlns:a16="http://schemas.microsoft.com/office/drawing/2014/main" val="3820238464"/>
+                  </a:ext>
+                </a:extLst>
+              </a:tr>
+              <a:tr h="370840">
+                <a:tc>
+                  <a:txBody>
+                    <a:bodyPr/>
+                    <a:lstStyle/>
+                    <a:p>
+                      <a:r>
+                        <a:rPr kumimoji="1" lang="ja-JP" altLang="en-US" dirty="0"/>
+                        <a:t>解放されるタイミング</a:t>
+                      </a:r>
+                    </a:p>
+                  </a:txBody>
+                  <a:tcPr/>
+                </a:tc>
+                <a:tc>
+                  <a:txBody>
+                    <a:bodyPr/>
+                    <a:lstStyle/>
+                    <a:p>
+                      <a:endParaRPr kumimoji="1" lang="ja-JP" altLang="en-US" dirty="0"/>
+                    </a:p>
+                  </a:txBody>
+                  <a:tcPr/>
+                </a:tc>
+                <a:extLst>
+                  <a:ext uri="{0D108BD9-81ED-4DB2-BD59-A6C34878D82A}">
+                    <a16:rowId xmlns:a16="http://schemas.microsoft.com/office/drawing/2014/main" val="4086754404"/>
+                  </a:ext>
+                </a:extLst>
+              </a:tr>
+              <a:tr h="370840">
+                <a:tc>
+                  <a:txBody>
+                    <a:bodyPr/>
+                    <a:lstStyle/>
+                    <a:p>
+                      <a:r>
+                        <a:rPr kumimoji="1" lang="ja-JP" altLang="en-US" dirty="0"/>
+                        <a:t>備考</a:t>
+                      </a:r>
+                    </a:p>
+                  </a:txBody>
+                  <a:tcPr/>
+                </a:tc>
+                <a:tc>
+                  <a:txBody>
+                    <a:bodyPr/>
+                    <a:lstStyle/>
+                    <a:p>
+                      <a:endParaRPr kumimoji="1" lang="ja-JP" altLang="en-US" dirty="0"/>
+                    </a:p>
+                  </a:txBody>
+                  <a:tcPr/>
+                </a:tc>
+                <a:extLst>
+                  <a:ext uri="{0D108BD9-81ED-4DB2-BD59-A6C34878D82A}">
+                    <a16:rowId xmlns:a16="http://schemas.microsoft.com/office/drawing/2014/main" val="1182665698"/>
+                  </a:ext>
+                </a:extLst>
+              </a:tr>
+            </a:tbl>
+          </a:graphicData>
+        </a:graphic>
+      </p:graphicFrame>
+    </p:spTree>
+    <p:extLst>
+      <p:ext uri="{BB962C8B-B14F-4D97-AF65-F5344CB8AC3E}">
+        <p14:creationId xmlns:p14="http://schemas.microsoft.com/office/powerpoint/2010/main" val="1513510081"/>
       </p:ext>
     </p:extLst>
   </p:cSld>

--- a/仕様書/キャラクター.pptx
+++ b/仕様書/キャラクター.pptx
@@ -13,7 +13,6 @@
     <p:sldId id="261" r:id="rId7"/>
     <p:sldId id="262" r:id="rId8"/>
     <p:sldId id="263" r:id="rId9"/>
-    <p:sldId id="264" r:id="rId10"/>
   </p:sldIdLst>
   <p:sldSz cx="12192000" cy="6858000"/>
   <p:notesSz cx="6858000" cy="9144000"/>
@@ -124,8 +123,8 @@
 <pc:chgInfo xmlns:a="http://schemas.openxmlformats.org/drawingml/2006/main" xmlns:r="http://schemas.openxmlformats.org/officeDocument/2006/relationships" xmlns:ac="http://schemas.microsoft.com/office/drawing/2013/main/command" xmlns:pc="http://schemas.microsoft.com/office/powerpoint/2013/main/command">
   <pc:docChgLst>
     <pc:chgData name="黒沢　爽次" userId="fae486ef-0c84-45a4-a237-2d2b758b0e89" providerId="ADAL" clId="{877D3135-8805-4070-AC31-404870FE827C}"/>
-    <pc:docChg chg="undo custSel addSld modSld">
-      <pc:chgData name="黒沢　爽次" userId="fae486ef-0c84-45a4-a237-2d2b758b0e89" providerId="ADAL" clId="{877D3135-8805-4070-AC31-404870FE827C}" dt="2026-06-04T01:34:03.700" v="2251" actId="20577"/>
+    <pc:docChg chg="undo custSel addSld delSld modSld">
+      <pc:chgData name="黒沢　爽次" userId="fae486ef-0c84-45a4-a237-2d2b758b0e89" providerId="ADAL" clId="{877D3135-8805-4070-AC31-404870FE827C}" dt="2026-06-04T02:24:09.602" v="2252" actId="2696"/>
       <pc:docMkLst>
         <pc:docMk/>
       </pc:docMkLst>
@@ -425,8 +424,8 @@
           </ac:spMkLst>
         </pc:spChg>
       </pc:sldChg>
-      <pc:sldChg chg="add">
-        <pc:chgData name="黒沢　爽次" userId="fae486ef-0c84-45a4-a237-2d2b758b0e89" providerId="ADAL" clId="{877D3135-8805-4070-AC31-404870FE827C}" dt="2026-06-04T00:46:56.698" v="736"/>
+      <pc:sldChg chg="add del">
+        <pc:chgData name="黒沢　爽次" userId="fae486ef-0c84-45a4-a237-2d2b758b0e89" providerId="ADAL" clId="{877D3135-8805-4070-AC31-404870FE827C}" dt="2026-06-04T02:24:09.602" v="2252" actId="2696"/>
         <pc:sldMkLst>
           <pc:docMk/>
           <pc:sldMk cId="1513510081" sldId="264"/>
@@ -3968,382 +3967,6 @@
 </p:sld>
 </file>
 
-<file path=ppt/slides/slide9.xml><?xml version="1.0" encoding="utf-8"?>
-<p:sld xmlns:a="http://schemas.openxmlformats.org/drawingml/2006/main" xmlns:r="http://schemas.openxmlformats.org/officeDocument/2006/relationships" xmlns:p="http://schemas.openxmlformats.org/presentationml/2006/main">
-  <p:cSld>
-    <p:spTree>
-      <p:nvGrpSpPr>
-        <p:cNvPr id="1" name=""/>
-        <p:cNvGrpSpPr/>
-        <p:nvPr/>
-      </p:nvGrpSpPr>
-      <p:grpSpPr>
-        <a:xfrm>
-          <a:off x="0" y="0"/>
-          <a:ext cx="0" cy="0"/>
-          <a:chOff x="0" y="0"/>
-          <a:chExt cx="0" cy="0"/>
-        </a:xfrm>
-      </p:grpSpPr>
-      <p:sp>
-        <p:nvSpPr>
-          <p:cNvPr id="4" name="テキスト ボックス 3">
-            <a:extLst>
-              <a:ext uri="{FF2B5EF4-FFF2-40B4-BE49-F238E27FC236}">
-                <a16:creationId xmlns:a16="http://schemas.microsoft.com/office/drawing/2014/main" id="{CDB930A9-01B5-42D9-BBEE-3F2501F91D8D}"/>
-              </a:ext>
-            </a:extLst>
-          </p:cNvPr>
-          <p:cNvSpPr txBox="1"/>
-          <p:nvPr/>
-        </p:nvSpPr>
-        <p:spPr>
-          <a:xfrm>
-            <a:off x="1353787" y="1460665"/>
-            <a:ext cx="1338828" cy="369332"/>
-          </a:xfrm>
-          <a:prstGeom prst="rect">
-            <a:avLst/>
-          </a:prstGeom>
-          <a:noFill/>
-        </p:spPr>
-        <p:txBody>
-          <a:bodyPr wrap="none" rtlCol="0">
-            <a:spAutoFit/>
-          </a:bodyPr>
-          <a:lstStyle/>
-          <a:p>
-            <a:r>
-              <a:rPr kumimoji="1" lang="ja-JP" altLang="en-US" u="sng" dirty="0"/>
-              <a:t>バランス型</a:t>
-            </a:r>
-          </a:p>
-        </p:txBody>
-      </p:sp>
-      <p:graphicFrame>
-        <p:nvGraphicFramePr>
-          <p:cNvPr id="6" name="表 6">
-            <a:extLst>
-              <a:ext uri="{FF2B5EF4-FFF2-40B4-BE49-F238E27FC236}">
-                <a16:creationId xmlns:a16="http://schemas.microsoft.com/office/drawing/2014/main" id="{ADFAA198-4C82-47B3-998F-E717146F6CA7}"/>
-              </a:ext>
-            </a:extLst>
-          </p:cNvPr>
-          <p:cNvGraphicFramePr>
-            <a:graphicFrameLocks noGrp="1"/>
-          </p:cNvGraphicFramePr>
-          <p:nvPr/>
-        </p:nvGraphicFramePr>
-        <p:xfrm>
-          <a:off x="1746993" y="2432124"/>
-          <a:ext cx="8128000" cy="3337560"/>
-        </p:xfrm>
-        <a:graphic>
-          <a:graphicData uri="http://schemas.openxmlformats.org/drawingml/2006/table">
-            <a:tbl>
-              <a:tblPr firstRow="1" bandRow="1">
-                <a:tableStyleId>{5C22544A-7EE6-4342-B048-85BDC9FD1C3A}</a:tableStyleId>
-              </a:tblPr>
-              <a:tblGrid>
-                <a:gridCol w="2575625">
-                  <a:extLst>
-                    <a:ext uri="{9D8B030D-6E8A-4147-A177-3AD203B41FA5}">
-                      <a16:colId xmlns:a16="http://schemas.microsoft.com/office/drawing/2014/main" val="2168610415"/>
-                    </a:ext>
-                  </a:extLst>
-                </a:gridCol>
-                <a:gridCol w="5552375">
-                  <a:extLst>
-                    <a:ext uri="{9D8B030D-6E8A-4147-A177-3AD203B41FA5}">
-                      <a16:colId xmlns:a16="http://schemas.microsoft.com/office/drawing/2014/main" val="3530299536"/>
-                    </a:ext>
-                  </a:extLst>
-                </a:gridCol>
-              </a:tblGrid>
-              <a:tr h="370840">
-                <a:tc>
-                  <a:txBody>
-                    <a:bodyPr/>
-                    <a:lstStyle/>
-                    <a:p>
-                      <a:endParaRPr kumimoji="1" lang="ja-JP" altLang="en-US" dirty="0"/>
-                    </a:p>
-                  </a:txBody>
-                  <a:tcPr/>
-                </a:tc>
-                <a:tc>
-                  <a:txBody>
-                    <a:bodyPr/>
-                    <a:lstStyle/>
-                    <a:p>
-                      <a:endParaRPr kumimoji="1" lang="ja-JP" altLang="en-US"/>
-                    </a:p>
-                  </a:txBody>
-                  <a:tcPr/>
-                </a:tc>
-                <a:extLst>
-                  <a:ext uri="{0D108BD9-81ED-4DB2-BD59-A6C34878D82A}">
-                    <a16:rowId xmlns:a16="http://schemas.microsoft.com/office/drawing/2014/main" val="287851579"/>
-                  </a:ext>
-                </a:extLst>
-              </a:tr>
-              <a:tr h="370840">
-                <a:tc>
-                  <a:txBody>
-                    <a:bodyPr/>
-                    <a:lstStyle/>
-                    <a:p>
-                      <a:r>
-                        <a:rPr kumimoji="1" lang="ja-JP" altLang="en-US" dirty="0"/>
-                        <a:t>体力</a:t>
-                      </a:r>
-                    </a:p>
-                  </a:txBody>
-                  <a:tcPr/>
-                </a:tc>
-                <a:tc>
-                  <a:txBody>
-                    <a:bodyPr/>
-                    <a:lstStyle/>
-                    <a:p>
-                      <a:endParaRPr kumimoji="1" lang="ja-JP" altLang="en-US"/>
-                    </a:p>
-                  </a:txBody>
-                  <a:tcPr/>
-                </a:tc>
-                <a:extLst>
-                  <a:ext uri="{0D108BD9-81ED-4DB2-BD59-A6C34878D82A}">
-                    <a16:rowId xmlns:a16="http://schemas.microsoft.com/office/drawing/2014/main" val="2179425768"/>
-                  </a:ext>
-                </a:extLst>
-              </a:tr>
-              <a:tr h="370840">
-                <a:tc>
-                  <a:txBody>
-                    <a:bodyPr/>
-                    <a:lstStyle/>
-                    <a:p>
-                      <a:r>
-                        <a:rPr kumimoji="1" lang="ja-JP" altLang="en-US" dirty="0"/>
-                        <a:t>攻撃力</a:t>
-                      </a:r>
-                    </a:p>
-                  </a:txBody>
-                  <a:tcPr/>
-                </a:tc>
-                <a:tc>
-                  <a:txBody>
-                    <a:bodyPr/>
-                    <a:lstStyle/>
-                    <a:p>
-                      <a:endParaRPr kumimoji="1" lang="ja-JP" altLang="en-US"/>
-                    </a:p>
-                  </a:txBody>
-                  <a:tcPr/>
-                </a:tc>
-                <a:extLst>
-                  <a:ext uri="{0D108BD9-81ED-4DB2-BD59-A6C34878D82A}">
-                    <a16:rowId xmlns:a16="http://schemas.microsoft.com/office/drawing/2014/main" val="2170705841"/>
-                  </a:ext>
-                </a:extLst>
-              </a:tr>
-              <a:tr h="370840">
-                <a:tc>
-                  <a:txBody>
-                    <a:bodyPr/>
-                    <a:lstStyle/>
-                    <a:p>
-                      <a:r>
-                        <a:rPr kumimoji="1" lang="ja-JP" altLang="en-US" dirty="0"/>
-                        <a:t>素早さ</a:t>
-                      </a:r>
-                    </a:p>
-                  </a:txBody>
-                  <a:tcPr/>
-                </a:tc>
-                <a:tc>
-                  <a:txBody>
-                    <a:bodyPr/>
-                    <a:lstStyle/>
-                    <a:p>
-                      <a:endParaRPr kumimoji="1" lang="ja-JP" altLang="en-US"/>
-                    </a:p>
-                  </a:txBody>
-                  <a:tcPr/>
-                </a:tc>
-                <a:extLst>
-                  <a:ext uri="{0D108BD9-81ED-4DB2-BD59-A6C34878D82A}">
-                    <a16:rowId xmlns:a16="http://schemas.microsoft.com/office/drawing/2014/main" val="1438526933"/>
-                  </a:ext>
-                </a:extLst>
-              </a:tr>
-              <a:tr h="370840">
-                <a:tc>
-                  <a:txBody>
-                    <a:bodyPr/>
-                    <a:lstStyle/>
-                    <a:p>
-                      <a:r>
-                        <a:rPr kumimoji="1" lang="ja-JP" altLang="en-US" dirty="0"/>
-                        <a:t>通常攻撃</a:t>
-                      </a:r>
-                    </a:p>
-                  </a:txBody>
-                  <a:tcPr/>
-                </a:tc>
-                <a:tc>
-                  <a:txBody>
-                    <a:bodyPr/>
-                    <a:lstStyle/>
-                    <a:p>
-                      <a:endParaRPr kumimoji="1" lang="ja-JP" altLang="en-US"/>
-                    </a:p>
-                  </a:txBody>
-                  <a:tcPr/>
-                </a:tc>
-                <a:extLst>
-                  <a:ext uri="{0D108BD9-81ED-4DB2-BD59-A6C34878D82A}">
-                    <a16:rowId xmlns:a16="http://schemas.microsoft.com/office/drawing/2014/main" val="391020856"/>
-                  </a:ext>
-                </a:extLst>
-              </a:tr>
-              <a:tr h="370840">
-                <a:tc>
-                  <a:txBody>
-                    <a:bodyPr/>
-                    <a:lstStyle/>
-                    <a:p>
-                      <a:r>
-                        <a:rPr kumimoji="1" lang="ja-JP" altLang="en-US" dirty="0"/>
-                        <a:t>スキル</a:t>
-                      </a:r>
-                    </a:p>
-                  </a:txBody>
-                  <a:tcPr/>
-                </a:tc>
-                <a:tc>
-                  <a:txBody>
-                    <a:bodyPr/>
-                    <a:lstStyle/>
-                    <a:p>
-                      <a:endParaRPr kumimoji="1" lang="ja-JP" altLang="en-US"/>
-                    </a:p>
-                  </a:txBody>
-                  <a:tcPr/>
-                </a:tc>
-                <a:extLst>
-                  <a:ext uri="{0D108BD9-81ED-4DB2-BD59-A6C34878D82A}">
-                    <a16:rowId xmlns:a16="http://schemas.microsoft.com/office/drawing/2014/main" val="969716069"/>
-                  </a:ext>
-                </a:extLst>
-              </a:tr>
-              <a:tr h="370840">
-                <a:tc>
-                  <a:txBody>
-                    <a:bodyPr/>
-                    <a:lstStyle/>
-                    <a:p>
-                      <a:r>
-                        <a:rPr kumimoji="1" lang="ja-JP" altLang="en-US" dirty="0"/>
-                        <a:t>必殺技</a:t>
-                      </a:r>
-                    </a:p>
-                  </a:txBody>
-                  <a:tcPr/>
-                </a:tc>
-                <a:tc>
-                  <a:txBody>
-                    <a:bodyPr/>
-                    <a:lstStyle/>
-                    <a:p>
-                      <a:endParaRPr kumimoji="1" lang="ja-JP" altLang="en-US" dirty="0"/>
-                    </a:p>
-                  </a:txBody>
-                  <a:tcPr/>
-                </a:tc>
-                <a:extLst>
-                  <a:ext uri="{0D108BD9-81ED-4DB2-BD59-A6C34878D82A}">
-                    <a16:rowId xmlns:a16="http://schemas.microsoft.com/office/drawing/2014/main" val="3820238464"/>
-                  </a:ext>
-                </a:extLst>
-              </a:tr>
-              <a:tr h="370840">
-                <a:tc>
-                  <a:txBody>
-                    <a:bodyPr/>
-                    <a:lstStyle/>
-                    <a:p>
-                      <a:r>
-                        <a:rPr kumimoji="1" lang="ja-JP" altLang="en-US" dirty="0"/>
-                        <a:t>解放されるタイミング</a:t>
-                      </a:r>
-                    </a:p>
-                  </a:txBody>
-                  <a:tcPr/>
-                </a:tc>
-                <a:tc>
-                  <a:txBody>
-                    <a:bodyPr/>
-                    <a:lstStyle/>
-                    <a:p>
-                      <a:endParaRPr kumimoji="1" lang="ja-JP" altLang="en-US" dirty="0"/>
-                    </a:p>
-                  </a:txBody>
-                  <a:tcPr/>
-                </a:tc>
-                <a:extLst>
-                  <a:ext uri="{0D108BD9-81ED-4DB2-BD59-A6C34878D82A}">
-                    <a16:rowId xmlns:a16="http://schemas.microsoft.com/office/drawing/2014/main" val="4086754404"/>
-                  </a:ext>
-                </a:extLst>
-              </a:tr>
-              <a:tr h="370840">
-                <a:tc>
-                  <a:txBody>
-                    <a:bodyPr/>
-                    <a:lstStyle/>
-                    <a:p>
-                      <a:r>
-                        <a:rPr kumimoji="1" lang="ja-JP" altLang="en-US" dirty="0"/>
-                        <a:t>備考</a:t>
-                      </a:r>
-                    </a:p>
-                  </a:txBody>
-                  <a:tcPr/>
-                </a:tc>
-                <a:tc>
-                  <a:txBody>
-                    <a:bodyPr/>
-                    <a:lstStyle/>
-                    <a:p>
-                      <a:endParaRPr kumimoji="1" lang="ja-JP" altLang="en-US" dirty="0"/>
-                    </a:p>
-                  </a:txBody>
-                  <a:tcPr/>
-                </a:tc>
-                <a:extLst>
-                  <a:ext uri="{0D108BD9-81ED-4DB2-BD59-A6C34878D82A}">
-                    <a16:rowId xmlns:a16="http://schemas.microsoft.com/office/drawing/2014/main" val="1182665698"/>
-                  </a:ext>
-                </a:extLst>
-              </a:tr>
-            </a:tbl>
-          </a:graphicData>
-        </a:graphic>
-      </p:graphicFrame>
-    </p:spTree>
-    <p:extLst>
-      <p:ext uri="{BB962C8B-B14F-4D97-AF65-F5344CB8AC3E}">
-        <p14:creationId xmlns:p14="http://schemas.microsoft.com/office/powerpoint/2010/main" val="1513510081"/>
-      </p:ext>
-    </p:extLst>
-  </p:cSld>
-  <p:clrMapOvr>
-    <a:masterClrMapping/>
-  </p:clrMapOvr>
-</p:sld>
-</file>
-
 <file path=ppt/theme/theme1.xml><?xml version="1.0" encoding="utf-8"?>
 <a:theme xmlns:a="http://schemas.openxmlformats.org/drawingml/2006/main" name="Office テーマ">
   <a:themeElements>

--- a/仕様書/キャラクター.pptx
+++ b/仕様書/キャラクター.pptx
@@ -124,18 +124,18 @@
   <pc:docChgLst>
     <pc:chgData name="黒沢　爽次" userId="fae486ef-0c84-45a4-a237-2d2b758b0e89" providerId="ADAL" clId="{877D3135-8805-4070-AC31-404870FE827C}"/>
     <pc:docChg chg="undo custSel addSld delSld modSld">
-      <pc:chgData name="黒沢　爽次" userId="fae486ef-0c84-45a4-a237-2d2b758b0e89" providerId="ADAL" clId="{877D3135-8805-4070-AC31-404870FE827C}" dt="2026-06-04T02:24:09.602" v="2252" actId="2696"/>
+      <pc:chgData name="黒沢　爽次" userId="fae486ef-0c84-45a4-a237-2d2b758b0e89" providerId="ADAL" clId="{877D3135-8805-4070-AC31-404870FE827C}" dt="2026-06-04T02:30:58.674" v="2253" actId="478"/>
       <pc:docMkLst>
         <pc:docMk/>
       </pc:docMkLst>
       <pc:sldChg chg="addSp delSp modSp new mod">
-        <pc:chgData name="黒沢　爽次" userId="fae486ef-0c84-45a4-a237-2d2b758b0e89" providerId="ADAL" clId="{877D3135-8805-4070-AC31-404870FE827C}" dt="2026-06-04T00:51:46.288" v="933" actId="1076"/>
+        <pc:chgData name="黒沢　爽次" userId="fae486ef-0c84-45a4-a237-2d2b758b0e89" providerId="ADAL" clId="{877D3135-8805-4070-AC31-404870FE827C}" dt="2026-06-04T02:30:58.674" v="2253" actId="478"/>
         <pc:sldMkLst>
           <pc:docMk/>
           <pc:sldMk cId="1755018402" sldId="256"/>
         </pc:sldMkLst>
-        <pc:spChg chg="add mod">
-          <ac:chgData name="黒沢　爽次" userId="fae486ef-0c84-45a4-a237-2d2b758b0e89" providerId="ADAL" clId="{877D3135-8805-4070-AC31-404870FE827C}" dt="2026-06-04T00:51:46.288" v="933" actId="1076"/>
+        <pc:spChg chg="add del mod">
+          <ac:chgData name="黒沢　爽次" userId="fae486ef-0c84-45a4-a237-2d2b758b0e89" providerId="ADAL" clId="{877D3135-8805-4070-AC31-404870FE827C}" dt="2026-06-04T02:30:58.674" v="2253" actId="478"/>
           <ac:spMkLst>
             <pc:docMk/>
             <pc:sldMk cId="1755018402" sldId="256"/>
@@ -1067,91 +1067,6 @@
           </a:p>
         </p:txBody>
       </p:sp>
-      <p:sp>
-        <p:nvSpPr>
-          <p:cNvPr id="2" name="テキスト ボックス 1">
-            <a:extLst>
-              <a:ext uri="{FF2B5EF4-FFF2-40B4-BE49-F238E27FC236}">
-                <a16:creationId xmlns:a16="http://schemas.microsoft.com/office/drawing/2014/main" id="{027F1829-1FF1-4B4F-ACF7-980DC9888073}"/>
-              </a:ext>
-            </a:extLst>
-          </p:cNvPr>
-          <p:cNvSpPr txBox="1"/>
-          <p:nvPr/>
-        </p:nvSpPr>
-        <p:spPr>
-          <a:xfrm>
-            <a:off x="5201392" y="2671948"/>
-            <a:ext cx="5782352" cy="923330"/>
-          </a:xfrm>
-          <a:prstGeom prst="rect">
-            <a:avLst/>
-          </a:prstGeom>
-          <a:noFill/>
-        </p:spPr>
-        <p:txBody>
-          <a:bodyPr wrap="none" rtlCol="0">
-            <a:spAutoFit/>
-          </a:bodyPr>
-          <a:lstStyle/>
-          <a:p>
-            <a:pPr marL="285750" indent="-285750">
-              <a:buFont typeface="Arial" panose="020B0604020202020204" pitchFamily="34" charset="0"/>
-              <a:buChar char="•"/>
-            </a:pPr>
-            <a:r>
-              <a:rPr kumimoji="1" lang="ja-JP" altLang="en-US" dirty="0"/>
-              <a:t>通常攻撃</a:t>
-            </a:r>
-            <a:r>
-              <a:rPr kumimoji="1" lang="en-US" altLang="ja-JP" dirty="0"/>
-              <a:t>…</a:t>
-            </a:r>
-            <a:r>
-              <a:rPr kumimoji="1" lang="ja-JP" altLang="en-US" dirty="0"/>
-              <a:t>無制限</a:t>
-            </a:r>
-            <a:endParaRPr kumimoji="1" lang="en-US" altLang="ja-JP" dirty="0"/>
-          </a:p>
-          <a:p>
-            <a:pPr marL="285750" indent="-285750">
-              <a:buFont typeface="Arial" panose="020B0604020202020204" pitchFamily="34" charset="0"/>
-              <a:buChar char="•"/>
-            </a:pPr>
-            <a:r>
-              <a:rPr lang="ja-JP" altLang="en-US" dirty="0"/>
-              <a:t>スキル</a:t>
-            </a:r>
-            <a:r>
-              <a:rPr lang="en-US" altLang="ja-JP" dirty="0"/>
-              <a:t>…</a:t>
-            </a:r>
-            <a:r>
-              <a:rPr lang="ja-JP" altLang="en-US" dirty="0"/>
-              <a:t>時間経過で使用可能に</a:t>
-            </a:r>
-            <a:endParaRPr lang="en-US" altLang="ja-JP" dirty="0"/>
-          </a:p>
-          <a:p>
-            <a:pPr marL="285750" indent="-285750">
-              <a:buFont typeface="Arial" panose="020B0604020202020204" pitchFamily="34" charset="0"/>
-              <a:buChar char="•"/>
-            </a:pPr>
-            <a:r>
-              <a:rPr kumimoji="1" lang="ja-JP" altLang="en-US" dirty="0"/>
-              <a:t>必殺技</a:t>
-            </a:r>
-            <a:r>
-              <a:rPr kumimoji="1" lang="en-US" altLang="ja-JP" dirty="0"/>
-              <a:t>…</a:t>
-            </a:r>
-            <a:r>
-              <a:rPr kumimoji="1" lang="ja-JP" altLang="en-US" dirty="0"/>
-              <a:t>エリア内のアイテムを集めると使用可能に</a:t>
-            </a:r>
-          </a:p>
-        </p:txBody>
-      </p:sp>
     </p:spTree>
     <p:extLst>
       <p:ext uri="{BB962C8B-B14F-4D97-AF65-F5344CB8AC3E}">
